--- a/research methods/term project - review article/slides/Untitled.pptx
+++ b/research methods/term project - review article/slides/Untitled.pptx
@@ -4,6 +4,9 @@
   <p:sldMasterIdLst>
     <p:sldMasterId id="2147483648" r:id="rId1"/>
   </p:sldMasterIdLst>
+  <p:notesMasterIdLst>
+    <p:notesMasterId r:id="rId17"/>
+  </p:notesMasterIdLst>
   <p:sldIdLst>
     <p:sldId id="256" r:id="rId2"/>
     <p:sldId id="257" r:id="rId3"/>
@@ -21,21 +24,120 @@
     <p:sldId id="269" r:id="rId15"/>
     <p:sldId id="270" r:id="rId16"/>
   </p:sldIdLst>
-  <p:notesMasterIdLst>
-    <p:notesMasterId r:id="rId17"/>
-  </p:notesMasterIdLst>
   <p:sldSz cx="21678900" cy="12192000"/>
   <p:notesSz cx="12192000" cy="21678900"/>
   <p:embeddedFontLst>
     <p:embeddedFont>
-      <p:font typeface="Liter" charset="-122" pitchFamily="34"/>
-      <p:regular r:id="rId22"/>
+      <p:font typeface="Liter" panose="020B0604020202020204" charset="0"/>
+      <p:regular r:id="rId18"/>
     </p:embeddedFont>
     <p:embeddedFont>
-      <p:font typeface="Quattrocento Sans" charset="-122" pitchFamily="34"/>
-      <p:regular r:id="rId23"/>
+      <p:font typeface="Quattrocento Sans" panose="020B0502050000020003" pitchFamily="34" charset="0"/>
+      <p:regular r:id="rId19"/>
+      <p:bold r:id="rId20"/>
+      <p:italic r:id="rId21"/>
     </p:embeddedFont>
   </p:embeddedFontLst>
+  <p:defaultTextStyle>
+    <a:defPPr>
+      <a:defRPr lang="en-US"/>
+    </a:defPPr>
+    <a:lvl1pPr marL="0" algn="l" defTabSz="914400" rtl="0" eaLnBrk="1" latinLnBrk="0" hangingPunct="1">
+      <a:defRPr sz="1800" kern="1200">
+        <a:solidFill>
+          <a:schemeClr val="tx1"/>
+        </a:solidFill>
+        <a:latin typeface="+mn-lt"/>
+        <a:ea typeface="+mn-ea"/>
+        <a:cs typeface="+mn-cs"/>
+      </a:defRPr>
+    </a:lvl1pPr>
+    <a:lvl2pPr marL="457200" algn="l" defTabSz="914400" rtl="0" eaLnBrk="1" latinLnBrk="0" hangingPunct="1">
+      <a:defRPr sz="1800" kern="1200">
+        <a:solidFill>
+          <a:schemeClr val="tx1"/>
+        </a:solidFill>
+        <a:latin typeface="+mn-lt"/>
+        <a:ea typeface="+mn-ea"/>
+        <a:cs typeface="+mn-cs"/>
+      </a:defRPr>
+    </a:lvl2pPr>
+    <a:lvl3pPr marL="914400" algn="l" defTabSz="914400" rtl="0" eaLnBrk="1" latinLnBrk="0" hangingPunct="1">
+      <a:defRPr sz="1800" kern="1200">
+        <a:solidFill>
+          <a:schemeClr val="tx1"/>
+        </a:solidFill>
+        <a:latin typeface="+mn-lt"/>
+        <a:ea typeface="+mn-ea"/>
+        <a:cs typeface="+mn-cs"/>
+      </a:defRPr>
+    </a:lvl3pPr>
+    <a:lvl4pPr marL="1371600" algn="l" defTabSz="914400" rtl="0" eaLnBrk="1" latinLnBrk="0" hangingPunct="1">
+      <a:defRPr sz="1800" kern="1200">
+        <a:solidFill>
+          <a:schemeClr val="tx1"/>
+        </a:solidFill>
+        <a:latin typeface="+mn-lt"/>
+        <a:ea typeface="+mn-ea"/>
+        <a:cs typeface="+mn-cs"/>
+      </a:defRPr>
+    </a:lvl4pPr>
+    <a:lvl5pPr marL="1828800" algn="l" defTabSz="914400" rtl="0" eaLnBrk="1" latinLnBrk="0" hangingPunct="1">
+      <a:defRPr sz="1800" kern="1200">
+        <a:solidFill>
+          <a:schemeClr val="tx1"/>
+        </a:solidFill>
+        <a:latin typeface="+mn-lt"/>
+        <a:ea typeface="+mn-ea"/>
+        <a:cs typeface="+mn-cs"/>
+      </a:defRPr>
+    </a:lvl5pPr>
+    <a:lvl6pPr marL="2286000" algn="l" defTabSz="914400" rtl="0" eaLnBrk="1" latinLnBrk="0" hangingPunct="1">
+      <a:defRPr sz="1800" kern="1200">
+        <a:solidFill>
+          <a:schemeClr val="tx1"/>
+        </a:solidFill>
+        <a:latin typeface="+mn-lt"/>
+        <a:ea typeface="+mn-ea"/>
+        <a:cs typeface="+mn-cs"/>
+      </a:defRPr>
+    </a:lvl6pPr>
+    <a:lvl7pPr marL="2743200" algn="l" defTabSz="914400" rtl="0" eaLnBrk="1" latinLnBrk="0" hangingPunct="1">
+      <a:defRPr sz="1800" kern="1200">
+        <a:solidFill>
+          <a:schemeClr val="tx1"/>
+        </a:solidFill>
+        <a:latin typeface="+mn-lt"/>
+        <a:ea typeface="+mn-ea"/>
+        <a:cs typeface="+mn-cs"/>
+      </a:defRPr>
+    </a:lvl7pPr>
+    <a:lvl8pPr marL="3200400" algn="l" defTabSz="914400" rtl="0" eaLnBrk="1" latinLnBrk="0" hangingPunct="1">
+      <a:defRPr sz="1800" kern="1200">
+        <a:solidFill>
+          <a:schemeClr val="tx1"/>
+        </a:solidFill>
+        <a:latin typeface="+mn-lt"/>
+        <a:ea typeface="+mn-ea"/>
+        <a:cs typeface="+mn-cs"/>
+      </a:defRPr>
+    </a:lvl8pPr>
+    <a:lvl9pPr marL="3657600" algn="l" defTabSz="914400" rtl="0" eaLnBrk="1" latinLnBrk="0" hangingPunct="1">
+      <a:defRPr sz="1800" kern="1200">
+        <a:solidFill>
+          <a:schemeClr val="tx1"/>
+        </a:solidFill>
+        <a:latin typeface="+mn-lt"/>
+        <a:ea typeface="+mn-ea"/>
+        <a:cs typeface="+mn-cs"/>
+      </a:defRPr>
+    </a:lvl9pPr>
+  </p:defaultTextStyle>
+  <p:extLst>
+    <p:ext uri="{EFAFB233-063F-42B5-8137-9DF3F51BA10A}">
+      <p15:sldGuideLst xmlns:p15="http://schemas.microsoft.com/office/powerpoint/2012/main"/>
+    </p:ext>
+  </p:extLst>
 </p:presentation>
 </file>
 
@@ -61,234 +163,10 @@
           <a:chExt cx="0" cy="0"/>
         </a:xfrm>
       </p:grpSpPr>
-      <p:sp>
-        <p:nvSpPr>
-          <p:cNvPr id="2" name="Header Placeholder 1"/>
-          <p:cNvSpPr>
-            <a:spLocks noGrp="1"/>
-          </p:cNvSpPr>
-          <p:nvPr>
-            <p:ph type="hdr" sz="quarter"/>
-          </p:nvPr>
-        </p:nvSpPr>
-        <p:spPr>
-          <a:xfrm>
-            <a:off x="0" y="0"/>
-            <a:ext cx="2971800" cy="458788"/>
-          </a:xfrm>
-          <a:prstGeom prst="rect">
-            <a:avLst/>
-          </a:prstGeom>
-        </p:spPr>
-        <p:txBody>
-          <a:bodyPr vert="horz" lIns="91440" tIns="45720" rIns="91440" bIns="45720" rtlCol="0"/>
-          <a:lstStyle>
-            <a:lvl1pPr algn="l">
-              <a:defRPr sz="1200"/>
-            </a:lvl1pPr>
-          </a:lstStyle>
-          <a:p>
-            <a:endParaRPr lang="en-US"/>
-          </a:p>
-        </p:txBody>
-      </p:sp>
-      <p:sp>
-        <p:nvSpPr>
-          <p:cNvPr id="3" name="Date Placeholder 2"/>
-          <p:cNvSpPr>
-            <a:spLocks noGrp="1"/>
-          </p:cNvSpPr>
-          <p:nvPr>
-            <p:ph type="dt" idx="1"/>
-          </p:nvPr>
-        </p:nvSpPr>
-        <p:spPr>
-          <a:xfrm>
-            <a:off x="3884613" y="0"/>
-            <a:ext cx="2971800" cy="458788"/>
-          </a:xfrm>
-          <a:prstGeom prst="rect">
-            <a:avLst/>
-          </a:prstGeom>
-        </p:spPr>
-        <p:txBody>
-          <a:bodyPr vert="horz" lIns="91440" tIns="45720" rIns="91440" bIns="45720" rtlCol="0"/>
-          <a:lstStyle>
-            <a:lvl1pPr algn="r">
-              <a:defRPr sz="1200"/>
-            </a:lvl1pPr>
-          </a:lstStyle>
-          <a:p>
-            <a:fld id="{5282F153-3F37-0F45-9E97-73ACFA13230C}" type="datetimeFigureOut">
-              <a:rPr lang="en-US"/>
-              <a:t>7/23/19</a:t>
-            </a:fld>
-            <a:endParaRPr lang="en-US"/>
-          </a:p>
-        </p:txBody>
-      </p:sp>
-      <p:sp>
-        <p:nvSpPr>
-          <p:cNvPr id="4" name="Slide Image Placeholder 3"/>
-          <p:cNvSpPr>
-            <a:spLocks noGrp="1" noRot="1" noChangeAspect="1"/>
-          </p:cNvSpPr>
-          <p:nvPr>
-            <p:ph type="sldImg" idx="2"/>
-          </p:nvPr>
-        </p:nvSpPr>
-        <p:spPr>
-          <a:xfrm>
-            <a:off x="685800" y="1143000"/>
-            <a:ext cx="5486400" cy="3086100"/>
-          </a:xfrm>
-          <a:prstGeom prst="rect">
-            <a:avLst/>
-          </a:prstGeom>
-          <a:noFill/>
-          <a:ln w="12700">
-            <a:solidFill>
-              <a:prstClr val="black"/>
-            </a:solidFill>
-          </a:ln>
-        </p:spPr>
-        <p:txBody>
-          <a:bodyPr vert="horz" lIns="91440" tIns="45720" rIns="91440" bIns="45720" rtlCol="0" anchor="ctr"/>
-          <a:lstStyle/>
-          <a:p>
-            <a:endParaRPr lang="en-US"/>
-          </a:p>
-        </p:txBody>
-      </p:sp>
-      <p:sp>
-        <p:nvSpPr>
-          <p:cNvPr id="5" name="Notes Placeholder 4"/>
-          <p:cNvSpPr>
-            <a:spLocks noGrp="1"/>
-          </p:cNvSpPr>
-          <p:nvPr>
-            <p:ph type="body" sz="quarter" idx="3"/>
-          </p:nvPr>
-        </p:nvSpPr>
-        <p:spPr>
-          <a:xfrm>
-            <a:off x="685800" y="4400550"/>
-            <a:ext cx="5486400" cy="3600450"/>
-          </a:xfrm>
-          <a:prstGeom prst="rect">
-            <a:avLst/>
-          </a:prstGeom>
-        </p:spPr>
-        <p:txBody>
-          <a:bodyPr vert="horz" lIns="91440" tIns="45720" rIns="91440" bIns="45720" rtlCol="0"/>
-          <a:lstStyle/>
-          <a:p>
-            <a:pPr lvl="0"/>
-            <a:r>
-              <a:rPr lang="en-US"/>
-              <a:t>Click to edit Master text styles</a:t>
-            </a:r>
-          </a:p>
-          <a:p>
-            <a:pPr lvl="1"/>
-            <a:r>
-              <a:rPr lang="en-US"/>
-              <a:t>Second level</a:t>
-            </a:r>
-          </a:p>
-          <a:p>
-            <a:pPr lvl="2"/>
-            <a:r>
-              <a:rPr lang="en-US"/>
-              <a:t>Third level</a:t>
-            </a:r>
-          </a:p>
-          <a:p>
-            <a:pPr lvl="3"/>
-            <a:r>
-              <a:rPr lang="en-US"/>
-              <a:t>Fourth level</a:t>
-            </a:r>
-          </a:p>
-          <a:p>
-            <a:pPr lvl="4"/>
-            <a:r>
-              <a:rPr lang="en-US"/>
-              <a:t>Fifth level</a:t>
-            </a:r>
-          </a:p>
-        </p:txBody>
-      </p:sp>
-      <p:sp>
-        <p:nvSpPr>
-          <p:cNvPr id="6" name="Footer Placeholder 5"/>
-          <p:cNvSpPr>
-            <a:spLocks noGrp="1"/>
-          </p:cNvSpPr>
-          <p:nvPr>
-            <p:ph type="ftr" sz="quarter" idx="4"/>
-          </p:nvPr>
-        </p:nvSpPr>
-        <p:spPr>
-          <a:xfrm>
-            <a:off x="0" y="8685213"/>
-            <a:ext cx="2971800" cy="458787"/>
-          </a:xfrm>
-          <a:prstGeom prst="rect">
-            <a:avLst/>
-          </a:prstGeom>
-        </p:spPr>
-        <p:txBody>
-          <a:bodyPr vert="horz" lIns="91440" tIns="45720" rIns="91440" bIns="45720" rtlCol="0" anchor="b"/>
-          <a:lstStyle>
-            <a:lvl1pPr algn="l">
-              <a:defRPr sz="1200"/>
-            </a:lvl1pPr>
-          </a:lstStyle>
-          <a:p>
-            <a:endParaRPr lang="en-US"/>
-          </a:p>
-        </p:txBody>
-      </p:sp>
-      <p:sp>
-        <p:nvSpPr>
-          <p:cNvPr id="7" name="Slide Number Placeholder 6"/>
-          <p:cNvSpPr>
-            <a:spLocks noGrp="1"/>
-          </p:cNvSpPr>
-          <p:nvPr>
-            <p:ph type="sldNum" sz="quarter" idx="5"/>
-          </p:nvPr>
-        </p:nvSpPr>
-        <p:spPr>
-          <a:xfrm>
-            <a:off x="3884613" y="8685213"/>
-            <a:ext cx="2971800" cy="458787"/>
-          </a:xfrm>
-          <a:prstGeom prst="rect">
-            <a:avLst/>
-          </a:prstGeom>
-        </p:spPr>
-        <p:txBody>
-          <a:bodyPr vert="horz" lIns="91440" tIns="45720" rIns="91440" bIns="45720" rtlCol="0" anchor="b"/>
-          <a:lstStyle>
-            <a:lvl1pPr algn="r">
-              <a:defRPr sz="1200"/>
-            </a:lvl1pPr>
-          </a:lstStyle>
-          <a:p>
-            <a:fld id="{CE5E9CC1-C706-0F49-92D6-E571CC5EEA8F}" type="slidenum">
-              <a:rPr lang="en-US"/>
-              <a:t>‹#›</a:t>
-            </a:fld>
-            <a:endParaRPr lang="en-US"/>
-          </a:p>
-        </p:txBody>
-      </p:sp>
     </p:spTree>
     <p:extLst>
       <p:ext uri="{BB962C8B-B14F-4D97-AF65-F5344CB8AC3E}">
-        <p14:creationId xmlns:p14="http://schemas.microsoft.com/office/powerpoint/2010/main" val="1024086991"/>
+        <p14:creationId xmlns:p14="http://schemas.microsoft.com/office/powerpoint/2010/main" val="3606239731"/>
       </p:ext>
     </p:extLst>
   </p:cSld>
@@ -432,10 +310,6 @@
           <a:bodyPr/>
           <a:lstStyle/>
           <a:p>
-            <a:r>
-              <a:rPr lang="en-US" dirty="0"/>
-              <a:t/>
-            </a:r>
             <a:endParaRPr lang="en-US" dirty="0"/>
           </a:p>
         </p:txBody>
@@ -520,10 +394,6 @@
           <a:bodyPr/>
           <a:lstStyle/>
           <a:p>
-            <a:r>
-              <a:rPr lang="en-US" dirty="0"/>
-              <a:t/>
-            </a:r>
             <a:endParaRPr lang="en-US" dirty="0"/>
           </a:p>
         </p:txBody>
@@ -608,10 +478,6 @@
           <a:bodyPr/>
           <a:lstStyle/>
           <a:p>
-            <a:r>
-              <a:rPr lang="en-US" dirty="0"/>
-              <a:t/>
-            </a:r>
             <a:endParaRPr lang="en-US" dirty="0"/>
           </a:p>
         </p:txBody>
@@ -696,10 +562,6 @@
           <a:bodyPr/>
           <a:lstStyle/>
           <a:p>
-            <a:r>
-              <a:rPr lang="en-US" dirty="0"/>
-              <a:t/>
-            </a:r>
             <a:endParaRPr lang="en-US" dirty="0"/>
           </a:p>
         </p:txBody>
@@ -784,10 +646,6 @@
           <a:bodyPr/>
           <a:lstStyle/>
           <a:p>
-            <a:r>
-              <a:rPr lang="en-US" dirty="0"/>
-              <a:t/>
-            </a:r>
             <a:endParaRPr lang="en-US" dirty="0"/>
           </a:p>
         </p:txBody>
@@ -872,10 +730,6 @@
           <a:bodyPr/>
           <a:lstStyle/>
           <a:p>
-            <a:r>
-              <a:rPr lang="en-US" dirty="0"/>
-              <a:t/>
-            </a:r>
             <a:endParaRPr lang="en-US" dirty="0"/>
           </a:p>
         </p:txBody>
@@ -960,10 +814,6 @@
           <a:bodyPr/>
           <a:lstStyle/>
           <a:p>
-            <a:r>
-              <a:rPr lang="en-US" dirty="0"/>
-              <a:t/>
-            </a:r>
             <a:endParaRPr lang="en-US" dirty="0"/>
           </a:p>
         </p:txBody>
@@ -1048,10 +898,6 @@
           <a:bodyPr/>
           <a:lstStyle/>
           <a:p>
-            <a:r>
-              <a:rPr lang="en-US" dirty="0"/>
-              <a:t/>
-            </a:r>
             <a:endParaRPr lang="en-US" dirty="0"/>
           </a:p>
         </p:txBody>
@@ -1136,10 +982,6 @@
           <a:bodyPr/>
           <a:lstStyle/>
           <a:p>
-            <a:r>
-              <a:rPr lang="en-US" dirty="0"/>
-              <a:t/>
-            </a:r>
             <a:endParaRPr lang="en-US" dirty="0"/>
           </a:p>
         </p:txBody>
@@ -1224,10 +1066,6 @@
           <a:bodyPr/>
           <a:lstStyle/>
           <a:p>
-            <a:r>
-              <a:rPr lang="en-US" dirty="0"/>
-              <a:t/>
-            </a:r>
             <a:endParaRPr lang="en-US" dirty="0"/>
           </a:p>
         </p:txBody>
@@ -1312,10 +1150,6 @@
           <a:bodyPr/>
           <a:lstStyle/>
           <a:p>
-            <a:r>
-              <a:rPr lang="en-US" dirty="0"/>
-              <a:t/>
-            </a:r>
             <a:endParaRPr lang="en-US" dirty="0"/>
           </a:p>
         </p:txBody>
@@ -1400,10 +1234,6 @@
           <a:bodyPr/>
           <a:lstStyle/>
           <a:p>
-            <a:r>
-              <a:rPr lang="en-US" dirty="0"/>
-              <a:t/>
-            </a:r>
             <a:endParaRPr lang="en-US" dirty="0"/>
           </a:p>
         </p:txBody>
@@ -1488,10 +1318,6 @@
           <a:bodyPr/>
           <a:lstStyle/>
           <a:p>
-            <a:r>
-              <a:rPr lang="en-US" dirty="0"/>
-              <a:t/>
-            </a:r>
             <a:endParaRPr lang="en-US" dirty="0"/>
           </a:p>
         </p:txBody>
@@ -1576,10 +1402,6 @@
           <a:bodyPr/>
           <a:lstStyle/>
           <a:p>
-            <a:r>
-              <a:rPr lang="en-US" dirty="0"/>
-              <a:t/>
-            </a:r>
             <a:endParaRPr lang="en-US" dirty="0"/>
           </a:p>
         </p:txBody>
@@ -1664,10 +1486,6 @@
           <a:bodyPr/>
           <a:lstStyle/>
           <a:p>
-            <a:r>
-              <a:rPr lang="en-US" dirty="0"/>
-              <a:t/>
-            </a:r>
             <a:endParaRPr lang="en-US" dirty="0"/>
           </a:p>
         </p:txBody>
@@ -1735,6 +1553,18 @@
   <p:clrMapOvr>
     <a:masterClrMapping/>
   </p:clrMapOvr>
+  <mc:AlternateContent xmlns:mc="http://schemas.openxmlformats.org/markup-compatibility/2006">
+    <mc:Choice xmlns:p159="http://schemas.microsoft.com/office/powerpoint/2015/09/main" Requires="p159">
+      <p:transition spd="slow">
+        <p159:morph option="byObject"/>
+      </p:transition>
+    </mc:Choice>
+    <mc:Fallback>
+      <p:transition spd="slow">
+        <p:fade/>
+      </p:transition>
+    </mc:Fallback>
+  </mc:AlternateContent>
 </p:sldLayout>
 </file>
 
@@ -1746,6 +1576,7 @@
         <a:solidFill>
           <a:srgbClr val="FFFFFF"/>
         </a:solidFill>
+        <a:effectLst/>
       </p:bgPr>
     </p:bg>
     <p:spTree>
@@ -1767,12 +1598,29 @@
   <p:clrMapOvr>
     <a:masterClrMapping/>
   </p:clrMapOvr>
+  <mc:AlternateContent xmlns:mc="http://schemas.openxmlformats.org/markup-compatibility/2006">
+    <mc:Choice xmlns:p159="http://schemas.microsoft.com/office/powerpoint/2015/09/main" Requires="p159">
+      <p:transition spd="slow">
+        <p159:morph option="byObject"/>
+      </p:transition>
+    </mc:Choice>
+    <mc:Fallback>
+      <p:transition spd="slow">
+        <p:fade/>
+      </p:transition>
+    </mc:Fallback>
+  </mc:AlternateContent>
 </p:sldLayout>
 </file>
 
 <file path=ppt/slideMasters/slideMaster1.xml><?xml version="1.0" encoding="utf-8"?>
 <p:sldMaster xmlns:a="http://schemas.openxmlformats.org/drawingml/2006/main" xmlns:r="http://schemas.openxmlformats.org/officeDocument/2006/relationships" xmlns:p="http://schemas.openxmlformats.org/presentationml/2006/main">
   <p:cSld>
+    <p:bg>
+      <p:bgRef idx="1001">
+        <a:schemeClr val="bg1"/>
+      </p:bgRef>
+    </p:bg>
     <p:spTree>
       <p:nvGrpSpPr>
         <p:cNvPr id="1" name=""/>
@@ -1794,6 +1642,18 @@
     <p:sldLayoutId id="2147483649" r:id="rId1"/>
     <p:sldLayoutId id="2147483650" r:id="rId2"/>
   </p:sldLayoutIdLst>
+  <mc:AlternateContent xmlns:mc="http://schemas.openxmlformats.org/markup-compatibility/2006">
+    <mc:Choice xmlns:p159="http://schemas.microsoft.com/office/powerpoint/2015/09/main" Requires="p159">
+      <p:transition spd="slow">
+        <p159:morph option="byObject"/>
+      </p:transition>
+    </mc:Choice>
+    <mc:Fallback>
+      <p:transition spd="slow">
+        <p:fade/>
+      </p:transition>
+    </mc:Fallback>
+  </mc:AlternateContent>
   <p:hf sldNum="0" hdr="0" ftr="0" dt="0"/>
   <p:txStyles>
     <p:titleStyle>
@@ -2053,7 +1913,7 @@
   <p:cSld name="Slide 1">
     <p:bg>
       <p:bgPr>
-        <a:gradFill rotWithShape="1" flip="none">
+        <a:gradFill flip="none" rotWithShape="1">
           <a:gsLst>
             <a:gs pos="0">
               <a:srgbClr val="F8FAFC"/>
@@ -2067,6 +1927,7 @@
           </a:gsLst>
           <a:lin ang="8100000" scaled="1"/>
         </a:gradFill>
+        <a:effectLst/>
       </p:bgPr>
     </p:bg>
     <p:spTree>
@@ -2152,7 +2013,7 @@
               </a:lnSpc>
             </a:pPr>
             <a:r>
-              <a:rPr lang="en-US" sz="1870" spc="400" kern="0" dirty="0">
+              <a:rPr lang="en-US" sz="1870" kern="0" spc="400" dirty="0">
                 <a:solidFill>
                   <a:srgbClr val="2563EB"/>
                 </a:solidFill>
@@ -2215,7 +2076,7 @@
               </a:lnSpc>
             </a:pPr>
             <a:r>
-              <a:rPr lang="en-US" sz="6930" b="1" spc="133" kern="0" dirty="0">
+              <a:rPr lang="en-US" sz="6930" b="1" kern="0" spc="133" dirty="0">
                 <a:solidFill>
                   <a:srgbClr val="1E293B"/>
                 </a:solidFill>
@@ -2278,7 +2139,7 @@
               </a:lnSpc>
             </a:pPr>
             <a:r>
-              <a:rPr lang="en-US" sz="6930" b="1" spc="133" kern="0" dirty="0">
+              <a:rPr lang="en-US" sz="6930" b="1" kern="0" spc="133" dirty="0">
                 <a:solidFill>
                   <a:srgbClr val="1E293B"/>
                 </a:solidFill>
@@ -2434,11 +2295,6 @@
               </a:rPr>
               <a:t>Jawwad Ahmad</a:t>
             </a:r>
-            <a:pPr>
-              <a:lnSpc>
-                <a:spcPct val="160000"/>
-              </a:lnSpc>
-            </a:pPr>
             <a:r>
               <a:rPr lang="en-US" sz="2130" dirty="0">
                 <a:solidFill>
@@ -2469,11 +2325,6 @@
               </a:rPr>
               <a:t>Supervisor: </a:t>
             </a:r>
-            <a:pPr>
-              <a:lnSpc>
-                <a:spcPct val="160000"/>
-              </a:lnSpc>
-            </a:pPr>
             <a:r>
               <a:rPr lang="en-US" sz="2130" b="1" dirty="0">
                 <a:solidFill>
@@ -2577,7 +2428,7 @@
               </a:lnSpc>
             </a:pPr>
             <a:r>
-              <a:rPr lang="en-US" sz="1730" spc="133" kern="0" dirty="0">
+              <a:rPr lang="en-US" sz="1730" kern="0" spc="133" dirty="0">
                 <a:solidFill>
                   <a:srgbClr val="64748B"/>
                 </a:solidFill>
@@ -2662,10 +2513,18 @@
   <p:clrMapOvr>
     <a:masterClrMapping/>
   </p:clrMapOvr>
-  <p:transition>
-    <p:fade/>
-    <p:spd val="med"/>
-  </p:transition>
+  <mc:AlternateContent xmlns:mc="http://schemas.openxmlformats.org/markup-compatibility/2006">
+    <mc:Choice xmlns:p159="http://schemas.microsoft.com/office/powerpoint/2015/09/main" Requires="p159">
+      <p:transition spd="slow">
+        <p159:morph option="byObject"/>
+      </p:transition>
+    </mc:Choice>
+    <mc:Fallback>
+      <p:transition spd="slow">
+        <p:fade/>
+      </p:transition>
+    </mc:Fallback>
+  </mc:AlternateContent>
 </p:sld>
 </file>
 
@@ -2677,6 +2536,7 @@
         <a:solidFill>
           <a:srgbClr val="F8FAFC"/>
         </a:solidFill>
+        <a:effectLst/>
       </p:bgPr>
     </p:bg>
     <p:spTree>
@@ -2762,7 +2622,7 @@
               </a:lnSpc>
             </a:pPr>
             <a:r>
-              <a:rPr lang="en-US" sz="1600" spc="133" kern="0" dirty="0">
+              <a:rPr lang="en-US" sz="1600" kern="0" spc="133" dirty="0">
                 <a:solidFill>
                   <a:srgbClr val="64748B"/>
                 </a:solidFill>
@@ -2825,7 +2685,7 @@
               </a:lnSpc>
             </a:pPr>
             <a:r>
-              <a:rPr lang="en-US" sz="1600" spc="133" kern="0" dirty="0">
+              <a:rPr lang="en-US" sz="1600" kern="0" spc="133" dirty="0">
                 <a:solidFill>
                   <a:srgbClr val="64748B"/>
                 </a:solidFill>
@@ -2888,7 +2748,7 @@
               </a:lnSpc>
             </a:pPr>
             <a:r>
-              <a:rPr lang="en-US" sz="1600" spc="133" kern="0" dirty="0">
+              <a:rPr lang="en-US" sz="1600" kern="0" spc="133" dirty="0">
                 <a:solidFill>
                   <a:srgbClr val="1E293B"/>
                 </a:solidFill>
@@ -2971,7 +2831,7 @@
               </a:lnSpc>
             </a:pPr>
             <a:r>
-              <a:rPr lang="en-US" sz="1600" spc="133" kern="0" dirty="0">
+              <a:rPr lang="en-US" sz="1600" kern="0" spc="133" dirty="0">
                 <a:solidFill>
                   <a:srgbClr val="64748B"/>
                 </a:solidFill>
@@ -4389,11 +4249,6 @@
               </a:rPr>
               <a:t>Mohammadi et al. (2025) — The Adversarial Paradox:</a:t>
             </a:r>
-            <a:pPr>
-              <a:lnSpc>
-                <a:spcPct val="150000"/>
-              </a:lnSpc>
-            </a:pPr>
             <a:r>
               <a:rPr lang="en-US" sz="2000" dirty="0">
                 <a:solidFill>
@@ -4477,10 +4332,18 @@
   <p:clrMapOvr>
     <a:masterClrMapping/>
   </p:clrMapOvr>
-  <p:transition>
-    <p:fade/>
-    <p:spd val="med"/>
-  </p:transition>
+  <mc:AlternateContent xmlns:mc="http://schemas.openxmlformats.org/markup-compatibility/2006">
+    <mc:Choice xmlns:p159="http://schemas.microsoft.com/office/powerpoint/2015/09/main" Requires="p159">
+      <p:transition spd="slow">
+        <p159:morph option="byObject"/>
+      </p:transition>
+    </mc:Choice>
+    <mc:Fallback>
+      <p:transition spd="slow">
+        <p:fade/>
+      </p:transition>
+    </mc:Fallback>
+  </mc:AlternateContent>
 </p:sld>
 </file>
 
@@ -4492,6 +4355,7 @@
         <a:solidFill>
           <a:srgbClr val="F8FAFC"/>
         </a:solidFill>
+        <a:effectLst/>
       </p:bgPr>
     </p:bg>
     <p:spTree>
@@ -4577,7 +4441,7 @@
               </a:lnSpc>
             </a:pPr>
             <a:r>
-              <a:rPr lang="en-US" sz="1600" spc="133" kern="0" dirty="0">
+              <a:rPr lang="en-US" sz="1600" kern="0" spc="133" dirty="0">
                 <a:solidFill>
                   <a:srgbClr val="64748B"/>
                 </a:solidFill>
@@ -4640,7 +4504,7 @@
               </a:lnSpc>
             </a:pPr>
             <a:r>
-              <a:rPr lang="en-US" sz="1600" spc="133" kern="0" dirty="0">
+              <a:rPr lang="en-US" sz="1600" kern="0" spc="133" dirty="0">
                 <a:solidFill>
                   <a:srgbClr val="64748B"/>
                 </a:solidFill>
@@ -4703,7 +4567,7 @@
               </a:lnSpc>
             </a:pPr>
             <a:r>
-              <a:rPr lang="en-US" sz="1600" spc="133" kern="0" dirty="0">
+              <a:rPr lang="en-US" sz="1600" kern="0" spc="133" dirty="0">
                 <a:solidFill>
                   <a:srgbClr val="1E293B"/>
                 </a:solidFill>
@@ -4786,7 +4650,7 @@
               </a:lnSpc>
             </a:pPr>
             <a:r>
-              <a:rPr lang="en-US" sz="1600" spc="133" kern="0" dirty="0">
+              <a:rPr lang="en-US" sz="1600" kern="0" spc="133" dirty="0">
                 <a:solidFill>
                   <a:srgbClr val="64748B"/>
                 </a:solidFill>
@@ -6221,10 +6085,18 @@
   <p:clrMapOvr>
     <a:masterClrMapping/>
   </p:clrMapOvr>
-  <p:transition>
-    <p:fade/>
-    <p:spd val="med"/>
-  </p:transition>
+  <mc:AlternateContent xmlns:mc="http://schemas.openxmlformats.org/markup-compatibility/2006">
+    <mc:Choice xmlns:p159="http://schemas.microsoft.com/office/powerpoint/2015/09/main" Requires="p159">
+      <p:transition spd="slow">
+        <p159:morph option="byObject"/>
+      </p:transition>
+    </mc:Choice>
+    <mc:Fallback>
+      <p:transition spd="slow">
+        <p:fade/>
+      </p:transition>
+    </mc:Fallback>
+  </mc:AlternateContent>
 </p:sld>
 </file>
 
@@ -6236,6 +6108,7 @@
         <a:solidFill>
           <a:srgbClr val="F8FAFC"/>
         </a:solidFill>
+        <a:effectLst/>
       </p:bgPr>
     </p:bg>
     <p:spTree>
@@ -6321,7 +6194,7 @@
               </a:lnSpc>
             </a:pPr>
             <a:r>
-              <a:rPr lang="en-US" sz="1600" spc="133" kern="0" dirty="0">
+              <a:rPr lang="en-US" sz="1600" kern="0" spc="133" dirty="0">
                 <a:solidFill>
                   <a:srgbClr val="64748B"/>
                 </a:solidFill>
@@ -6384,7 +6257,7 @@
               </a:lnSpc>
             </a:pPr>
             <a:r>
-              <a:rPr lang="en-US" sz="1600" spc="133" kern="0" dirty="0">
+              <a:rPr lang="en-US" sz="1600" kern="0" spc="133" dirty="0">
                 <a:solidFill>
                   <a:srgbClr val="64748B"/>
                 </a:solidFill>
@@ -6447,7 +6320,7 @@
               </a:lnSpc>
             </a:pPr>
             <a:r>
-              <a:rPr lang="en-US" sz="1600" spc="133" kern="0" dirty="0">
+              <a:rPr lang="en-US" sz="1600" kern="0" spc="133" dirty="0">
                 <a:solidFill>
                   <a:srgbClr val="1E293B"/>
                 </a:solidFill>
@@ -6530,7 +6403,7 @@
               </a:lnSpc>
             </a:pPr>
             <a:r>
-              <a:rPr lang="en-US" sz="1600" spc="133" kern="0" dirty="0">
+              <a:rPr lang="en-US" sz="1600" kern="0" spc="133" dirty="0">
                 <a:solidFill>
                   <a:srgbClr val="64748B"/>
                 </a:solidFill>
@@ -6629,7 +6502,7 @@
       </p:sp>
       <p:graphicFrame>
         <p:nvGraphicFramePr>
-          <p:cNvPr id="13" name="Table 0"/>
+          <p:cNvPr id="15" name="Table 0"/>
           <p:cNvGraphicFramePr>
             <a:graphicFrameLocks noGrp="1"/>
           </p:cNvGraphicFramePr>
@@ -6650,9 +6523,27 @@
             <a:tbl>
               <a:tblPr/>
               <a:tblGrid>
-                <a:gridCol w="5892813"/>
-                <a:gridCol w="8839219"/>
-                <a:gridCol w="4910677"/>
+                <a:gridCol w="5892813">
+                  <a:extLst>
+                    <a:ext uri="{9D8B030D-6E8A-4147-A177-3AD203B41FA5}">
+                      <a16:colId xmlns:a16="http://schemas.microsoft.com/office/drawing/2014/main" val="20000"/>
+                    </a:ext>
+                  </a:extLst>
+                </a:gridCol>
+                <a:gridCol w="8839219">
+                  <a:extLst>
+                    <a:ext uri="{9D8B030D-6E8A-4147-A177-3AD203B41FA5}">
+                      <a16:colId xmlns:a16="http://schemas.microsoft.com/office/drawing/2014/main" val="20001"/>
+                    </a:ext>
+                  </a:extLst>
+                </a:gridCol>
+                <a:gridCol w="4910677">
+                  <a:extLst>
+                    <a:ext uri="{9D8B030D-6E8A-4147-A177-3AD203B41FA5}">
+                      <a16:colId xmlns:a16="http://schemas.microsoft.com/office/drawing/2014/main" val="20002"/>
+                    </a:ext>
+                  </a:extLst>
+                </a:gridCol>
               </a:tblGrid>
               <a:tr h="733186">
                 <a:tc>
@@ -6679,7 +6570,7 @@
                       </a:endParaRPr>
                     </a:p>
                   </a:txBody>
-                  <a:tcPr marL="91440" marR="91440" marT="0" marB="0" anchor="ctr">
+                  <a:tcPr marT="0" marB="0" anchor="ctr">
                     <a:lnL w="12700" cap="flat" cmpd="sng" algn="ctr">
                       <a:solidFill>
                         <a:srgbClr val="CBD5E1"/>
@@ -6745,7 +6636,7 @@
                       </a:endParaRPr>
                     </a:p>
                   </a:txBody>
-                  <a:tcPr marL="91440" marR="91440" marT="0" marB="0" anchor="ctr">
+                  <a:tcPr marT="0" marB="0" anchor="ctr">
                     <a:lnL w="12700" cap="flat" cmpd="sng" algn="ctr">
                       <a:solidFill>
                         <a:srgbClr val="CBD5E1"/>
@@ -6811,7 +6702,7 @@
                       </a:endParaRPr>
                     </a:p>
                   </a:txBody>
-                  <a:tcPr marL="91440" marR="91440" marT="0" marB="0" anchor="ctr">
+                  <a:tcPr marT="0" marB="0" anchor="ctr">
                     <a:lnL w="12700" cap="flat" cmpd="sng" algn="ctr">
                       <a:solidFill>
                         <a:srgbClr val="CBD5E1"/>
@@ -6853,6 +6744,11 @@
                     </a:solidFill>
                   </a:tcPr>
                 </a:tc>
+                <a:extLst>
+                  <a:ext uri="{0D108BD9-81ED-4DB2-BD59-A6C34878D82A}">
+                    <a16:rowId xmlns:a16="http://schemas.microsoft.com/office/drawing/2014/main" val="10000"/>
+                  </a:ext>
+                </a:extLst>
               </a:tr>
               <a:tr h="935444">
                 <a:tc>
@@ -6879,15 +6775,21 @@
                       </a:endParaRPr>
                     </a:p>
                   </a:txBody>
-                  <a:tcPr marL="91440" marR="91440" marT="0" marB="0" anchor="ctr">
+                  <a:tcPr marT="0" marB="0" anchor="ctr">
                     <a:lnL w="0" cap="flat" cmpd="sng" algn="ctr">
                       <a:noFill/>
                     </a:lnL>
                     <a:lnR w="0" cap="flat" cmpd="sng" algn="ctr">
                       <a:noFill/>
                     </a:lnR>
-                    <a:lnT w="0" cap="flat" cmpd="sng" algn="ctr">
-                      <a:noFill/>
+                    <a:lnT w="12700" cap="flat" cmpd="sng" algn="ctr">
+                      <a:solidFill>
+                        <a:srgbClr val="CBD5E1"/>
+                      </a:solidFill>
+                      <a:prstDash val="solid"/>
+                      <a:round/>
+                      <a:headEnd type="none" w="med" len="med"/>
+                      <a:tailEnd type="none" w="med" len="med"/>
                     </a:lnT>
                     <a:lnB w="0" cap="flat" cmpd="sng" algn="ctr">
                       <a:noFill/>
@@ -6921,15 +6823,21 @@
                       </a:endParaRPr>
                     </a:p>
                   </a:txBody>
-                  <a:tcPr marL="91440" marR="91440" marT="0" marB="0" anchor="ctr">
+                  <a:tcPr marT="0" marB="0" anchor="ctr">
                     <a:lnL w="0" cap="flat" cmpd="sng" algn="ctr">
                       <a:noFill/>
                     </a:lnL>
                     <a:lnR w="0" cap="flat" cmpd="sng" algn="ctr">
                       <a:noFill/>
                     </a:lnR>
-                    <a:lnT w="0" cap="flat" cmpd="sng" algn="ctr">
-                      <a:noFill/>
+                    <a:lnT w="12700" cap="flat" cmpd="sng" algn="ctr">
+                      <a:solidFill>
+                        <a:srgbClr val="CBD5E1"/>
+                      </a:solidFill>
+                      <a:prstDash val="solid"/>
+                      <a:round/>
+                      <a:headEnd type="none" w="med" len="med"/>
+                      <a:tailEnd type="none" w="med" len="med"/>
                     </a:lnT>
                     <a:lnB w="0" cap="flat" cmpd="sng" algn="ctr">
                       <a:noFill/>
@@ -6963,15 +6871,21 @@
                       </a:endParaRPr>
                     </a:p>
                   </a:txBody>
-                  <a:tcPr marL="91440" marR="91440" marT="0" marB="0" anchor="ctr">
+                  <a:tcPr marT="0" marB="0" anchor="ctr">
                     <a:lnL w="0" cap="flat" cmpd="sng" algn="ctr">
                       <a:noFill/>
                     </a:lnL>
                     <a:lnR w="0" cap="flat" cmpd="sng" algn="ctr">
                       <a:noFill/>
                     </a:lnR>
-                    <a:lnT w="0" cap="flat" cmpd="sng" algn="ctr">
-                      <a:noFill/>
+                    <a:lnT w="12700" cap="flat" cmpd="sng" algn="ctr">
+                      <a:solidFill>
+                        <a:srgbClr val="CBD5E1"/>
+                      </a:solidFill>
+                      <a:prstDash val="solid"/>
+                      <a:round/>
+                      <a:headEnd type="none" w="med" len="med"/>
+                      <a:tailEnd type="none" w="med" len="med"/>
                     </a:lnT>
                     <a:lnB w="0" cap="flat" cmpd="sng" algn="ctr">
                       <a:noFill/>
@@ -6981,6 +6895,11 @@
                     </a:solidFill>
                   </a:tcPr>
                 </a:tc>
+                <a:extLst>
+                  <a:ext uri="{0D108BD9-81ED-4DB2-BD59-A6C34878D82A}">
+                    <a16:rowId xmlns:a16="http://schemas.microsoft.com/office/drawing/2014/main" val="10001"/>
+                  </a:ext>
+                </a:extLst>
               </a:tr>
               <a:tr h="935444">
                 <a:tc>
@@ -7007,7 +6926,7 @@
                       </a:endParaRPr>
                     </a:p>
                   </a:txBody>
-                  <a:tcPr marL="91440" marR="91440" marT="0" marB="0" anchor="ctr">
+                  <a:tcPr marT="0" marB="0" anchor="ctr">
                     <a:lnL w="0" cap="flat" cmpd="sng" algn="ctr">
                       <a:noFill/>
                     </a:lnL>
@@ -7049,7 +6968,7 @@
                       </a:endParaRPr>
                     </a:p>
                   </a:txBody>
-                  <a:tcPr marL="91440" marR="91440" marT="0" marB="0" anchor="ctr">
+                  <a:tcPr marT="0" marB="0" anchor="ctr">
                     <a:lnL w="0" cap="flat" cmpd="sng" algn="ctr">
                       <a:noFill/>
                     </a:lnL>
@@ -7091,7 +7010,7 @@
                       </a:endParaRPr>
                     </a:p>
                   </a:txBody>
-                  <a:tcPr marL="91440" marR="91440" marT="0" marB="0" anchor="ctr">
+                  <a:tcPr marT="0" marB="0" anchor="ctr">
                     <a:lnL w="0" cap="flat" cmpd="sng" algn="ctr">
                       <a:noFill/>
                     </a:lnL>
@@ -7109,6 +7028,11 @@
                     </a:solidFill>
                   </a:tcPr>
                 </a:tc>
+                <a:extLst>
+                  <a:ext uri="{0D108BD9-81ED-4DB2-BD59-A6C34878D82A}">
+                    <a16:rowId xmlns:a16="http://schemas.microsoft.com/office/drawing/2014/main" val="10002"/>
+                  </a:ext>
+                </a:extLst>
               </a:tr>
               <a:tr h="935444">
                 <a:tc>
@@ -7135,7 +7059,7 @@
                       </a:endParaRPr>
                     </a:p>
                   </a:txBody>
-                  <a:tcPr marL="91440" marR="91440" marT="0" marB="0" anchor="ctr">
+                  <a:tcPr marT="0" marB="0" anchor="ctr">
                     <a:lnL w="0" cap="flat" cmpd="sng" algn="ctr">
                       <a:noFill/>
                     </a:lnL>
@@ -7177,7 +7101,7 @@
                       </a:endParaRPr>
                     </a:p>
                   </a:txBody>
-                  <a:tcPr marL="91440" marR="91440" marT="0" marB="0" anchor="ctr">
+                  <a:tcPr marT="0" marB="0" anchor="ctr">
                     <a:lnL w="0" cap="flat" cmpd="sng" algn="ctr">
                       <a:noFill/>
                     </a:lnL>
@@ -7219,7 +7143,7 @@
                       </a:endParaRPr>
                     </a:p>
                   </a:txBody>
-                  <a:tcPr marL="91440" marR="91440" marT="0" marB="0" anchor="ctr">
+                  <a:tcPr marT="0" marB="0" anchor="ctr">
                     <a:lnL w="0" cap="flat" cmpd="sng" algn="ctr">
                       <a:noFill/>
                     </a:lnL>
@@ -7237,6 +7161,11 @@
                     </a:solidFill>
                   </a:tcPr>
                 </a:tc>
+                <a:extLst>
+                  <a:ext uri="{0D108BD9-81ED-4DB2-BD59-A6C34878D82A}">
+                    <a16:rowId xmlns:a16="http://schemas.microsoft.com/office/drawing/2014/main" val="10003"/>
+                  </a:ext>
+                </a:extLst>
               </a:tr>
               <a:tr h="935444">
                 <a:tc>
@@ -7263,7 +7192,7 @@
                       </a:endParaRPr>
                     </a:p>
                   </a:txBody>
-                  <a:tcPr marL="91440" marR="91440" marT="0" marB="0" anchor="ctr">
+                  <a:tcPr marT="0" marB="0" anchor="ctr">
                     <a:lnL w="0" cap="flat" cmpd="sng" algn="ctr">
                       <a:noFill/>
                     </a:lnL>
@@ -7305,7 +7234,7 @@
                       </a:endParaRPr>
                     </a:p>
                   </a:txBody>
-                  <a:tcPr marL="91440" marR="91440" marT="0" marB="0" anchor="ctr">
+                  <a:tcPr marT="0" marB="0" anchor="ctr">
                     <a:lnL w="0" cap="flat" cmpd="sng" algn="ctr">
                       <a:noFill/>
                     </a:lnL>
@@ -7347,7 +7276,7 @@
                       </a:endParaRPr>
                     </a:p>
                   </a:txBody>
-                  <a:tcPr marL="91440" marR="91440" marT="0" marB="0" anchor="ctr">
+                  <a:tcPr marT="0" marB="0" anchor="ctr">
                     <a:lnL w="0" cap="flat" cmpd="sng" algn="ctr">
                       <a:noFill/>
                     </a:lnL>
@@ -7365,6 +7294,11 @@
                     </a:solidFill>
                   </a:tcPr>
                 </a:tc>
+                <a:extLst>
+                  <a:ext uri="{0D108BD9-81ED-4DB2-BD59-A6C34878D82A}">
+                    <a16:rowId xmlns:a16="http://schemas.microsoft.com/office/drawing/2014/main" val="10004"/>
+                  </a:ext>
+                </a:extLst>
               </a:tr>
               <a:tr h="935444">
                 <a:tc>
@@ -7391,7 +7325,7 @@
                       </a:endParaRPr>
                     </a:p>
                   </a:txBody>
-                  <a:tcPr marL="91440" marR="91440" marT="0" marB="0" anchor="ctr">
+                  <a:tcPr marT="0" marB="0" anchor="ctr">
                     <a:lnL w="0" cap="flat" cmpd="sng" algn="ctr">
                       <a:noFill/>
                     </a:lnL>
@@ -7433,7 +7367,7 @@
                       </a:endParaRPr>
                     </a:p>
                   </a:txBody>
-                  <a:tcPr marL="91440" marR="91440" marT="0" marB="0" anchor="ctr">
+                  <a:tcPr marT="0" marB="0" anchor="ctr">
                     <a:lnL w="0" cap="flat" cmpd="sng" algn="ctr">
                       <a:noFill/>
                     </a:lnL>
@@ -7475,7 +7409,7 @@
                       </a:endParaRPr>
                     </a:p>
                   </a:txBody>
-                  <a:tcPr marL="91440" marR="91440" marT="0" marB="0" anchor="ctr">
+                  <a:tcPr marT="0" marB="0" anchor="ctr">
                     <a:lnL w="0" cap="flat" cmpd="sng" algn="ctr">
                       <a:noFill/>
                     </a:lnL>
@@ -7493,6 +7427,11 @@
                     </a:solidFill>
                   </a:tcPr>
                 </a:tc>
+                <a:extLst>
+                  <a:ext uri="{0D108BD9-81ED-4DB2-BD59-A6C34878D82A}">
+                    <a16:rowId xmlns:a16="http://schemas.microsoft.com/office/drawing/2014/main" val="10005"/>
+                  </a:ext>
+                </a:extLst>
               </a:tr>
               <a:tr h="935444">
                 <a:tc>
@@ -7519,7 +7458,7 @@
                       </a:endParaRPr>
                     </a:p>
                   </a:txBody>
-                  <a:tcPr marL="91440" marR="91440" marT="0" marB="0" anchor="ctr">
+                  <a:tcPr marT="0" marB="0" anchor="ctr">
                     <a:lnL w="0" cap="flat" cmpd="sng" algn="ctr">
                       <a:noFill/>
                     </a:lnL>
@@ -7561,7 +7500,7 @@
                       </a:endParaRPr>
                     </a:p>
                   </a:txBody>
-                  <a:tcPr marL="91440" marR="91440" marT="0" marB="0" anchor="ctr">
+                  <a:tcPr marT="0" marB="0" anchor="ctr">
                     <a:lnL w="0" cap="flat" cmpd="sng" algn="ctr">
                       <a:noFill/>
                     </a:lnL>
@@ -7603,7 +7542,7 @@
                       </a:endParaRPr>
                     </a:p>
                   </a:txBody>
-                  <a:tcPr marL="91440" marR="91440" marT="0" marB="0" anchor="ctr">
+                  <a:tcPr marT="0" marB="0" anchor="ctr">
                     <a:lnL w="0" cap="flat" cmpd="sng" algn="ctr">
                       <a:noFill/>
                     </a:lnL>
@@ -7621,6 +7560,11 @@
                     </a:solidFill>
                   </a:tcPr>
                 </a:tc>
+                <a:extLst>
+                  <a:ext uri="{0D108BD9-81ED-4DB2-BD59-A6C34878D82A}">
+                    <a16:rowId xmlns:a16="http://schemas.microsoft.com/office/drawing/2014/main" val="10006"/>
+                  </a:ext>
+                </a:extLst>
               </a:tr>
               <a:tr h="935444">
                 <a:tc>
@@ -7647,7 +7591,7 @@
                       </a:endParaRPr>
                     </a:p>
                   </a:txBody>
-                  <a:tcPr marL="91440" marR="91440" marT="0" marB="0" anchor="ctr">
+                  <a:tcPr marT="0" marB="0" anchor="ctr">
                     <a:lnL w="0" cap="flat" cmpd="sng" algn="ctr">
                       <a:noFill/>
                     </a:lnL>
@@ -7689,7 +7633,7 @@
                       </a:endParaRPr>
                     </a:p>
                   </a:txBody>
-                  <a:tcPr marL="91440" marR="91440" marT="0" marB="0" anchor="ctr">
+                  <a:tcPr marT="0" marB="0" anchor="ctr">
                     <a:lnL w="0" cap="flat" cmpd="sng" algn="ctr">
                       <a:noFill/>
                     </a:lnL>
@@ -7731,7 +7675,7 @@
                       </a:endParaRPr>
                     </a:p>
                   </a:txBody>
-                  <a:tcPr marL="91440" marR="91440" marT="0" marB="0" anchor="ctr">
+                  <a:tcPr marT="0" marB="0" anchor="ctr">
                     <a:lnL w="0" cap="flat" cmpd="sng" algn="ctr">
                       <a:noFill/>
                     </a:lnL>
@@ -7749,6 +7693,11 @@
                     </a:solidFill>
                   </a:tcPr>
                 </a:tc>
+                <a:extLst>
+                  <a:ext uri="{0D108BD9-81ED-4DB2-BD59-A6C34878D82A}">
+                    <a16:rowId xmlns:a16="http://schemas.microsoft.com/office/drawing/2014/main" val="10007"/>
+                  </a:ext>
+                </a:extLst>
               </a:tr>
             </a:tbl>
           </a:graphicData>
@@ -7858,11 +7807,6 @@
               </a:rPr>
               <a:t>★</a:t>
             </a:r>
-            <a:pPr>
-              <a:lnSpc>
-                <a:spcPct val="100000"/>
-              </a:lnSpc>
-            </a:pPr>
             <a:r>
               <a:rPr lang="en-US" sz="2000" dirty="0">
                 <a:solidFill>
@@ -7874,11 +7818,6 @@
               </a:rPr>
               <a:t> </a:t>
             </a:r>
-            <a:pPr>
-              <a:lnSpc>
-                <a:spcPct val="100000"/>
-              </a:lnSpc>
-            </a:pPr>
             <a:r>
               <a:rPr lang="en-US" sz="2000" b="1" dirty="0">
                 <a:solidFill>
@@ -7890,11 +7829,6 @@
               </a:rPr>
               <a:t>Grammatical standardization</a:t>
             </a:r>
-            <a:pPr>
-              <a:lnSpc>
-                <a:spcPct val="100000"/>
-              </a:lnSpc>
-            </a:pPr>
             <a:r>
               <a:rPr lang="en-US" sz="2000" dirty="0">
                 <a:solidFill>
@@ -7978,10 +7912,18 @@
   <p:clrMapOvr>
     <a:masterClrMapping/>
   </p:clrMapOvr>
-  <p:transition>
-    <p:fade/>
-    <p:spd val="med"/>
-  </p:transition>
+  <mc:AlternateContent xmlns:mc="http://schemas.openxmlformats.org/markup-compatibility/2006">
+    <mc:Choice xmlns:p159="http://schemas.microsoft.com/office/powerpoint/2015/09/main" Requires="p159">
+      <p:transition spd="slow">
+        <p159:morph option="byObject"/>
+      </p:transition>
+    </mc:Choice>
+    <mc:Fallback>
+      <p:transition spd="slow">
+        <p:fade/>
+      </p:transition>
+    </mc:Fallback>
+  </mc:AlternateContent>
 </p:sld>
 </file>
 
@@ -7990,7 +7932,7 @@
   <p:cSld name="Slide 13">
     <p:bg>
       <p:bgPr>
-        <a:gradFill rotWithShape="1" flip="none">
+        <a:gradFill flip="none" rotWithShape="1">
           <a:gsLst>
             <a:gs pos="0">
               <a:srgbClr val="F8FAFC"/>
@@ -8004,6 +7946,7 @@
           </a:gsLst>
           <a:lin ang="8100000" scaled="1"/>
         </a:gradFill>
+        <a:effectLst/>
       </p:bgPr>
     </p:bg>
     <p:spTree>
@@ -8280,10 +8223,18 @@
   <p:clrMapOvr>
     <a:masterClrMapping/>
   </p:clrMapOvr>
-  <p:transition>
-    <p:fade/>
-    <p:spd val="med"/>
-  </p:transition>
+  <mc:AlternateContent xmlns:mc="http://schemas.openxmlformats.org/markup-compatibility/2006">
+    <mc:Choice xmlns:p159="http://schemas.microsoft.com/office/powerpoint/2015/09/main" Requires="p159">
+      <p:transition spd="slow">
+        <p159:morph option="byObject"/>
+      </p:transition>
+    </mc:Choice>
+    <mc:Fallback>
+      <p:transition spd="slow">
+        <p:fade/>
+      </p:transition>
+    </mc:Fallback>
+  </mc:AlternateContent>
 </p:sld>
 </file>
 
@@ -8295,6 +8246,7 @@
         <a:solidFill>
           <a:srgbClr val="F8FAFC"/>
         </a:solidFill>
+        <a:effectLst/>
       </p:bgPr>
     </p:bg>
     <p:spTree>
@@ -8380,7 +8332,7 @@
               </a:lnSpc>
             </a:pPr>
             <a:r>
-              <a:rPr lang="en-US" sz="1600" spc="133" kern="0" dirty="0">
+              <a:rPr lang="en-US" sz="1600" kern="0" spc="133" dirty="0">
                 <a:solidFill>
                   <a:srgbClr val="64748B"/>
                 </a:solidFill>
@@ -8443,7 +8395,7 @@
               </a:lnSpc>
             </a:pPr>
             <a:r>
-              <a:rPr lang="en-US" sz="1600" spc="133" kern="0" dirty="0">
+              <a:rPr lang="en-US" sz="1600" kern="0" spc="133" dirty="0">
                 <a:solidFill>
                   <a:srgbClr val="64748B"/>
                 </a:solidFill>
@@ -8506,7 +8458,7 @@
               </a:lnSpc>
             </a:pPr>
             <a:r>
-              <a:rPr lang="en-US" sz="1600" spc="133" kern="0" dirty="0">
+              <a:rPr lang="en-US" sz="1600" kern="0" spc="133" dirty="0">
                 <a:solidFill>
                   <a:srgbClr val="64748B"/>
                 </a:solidFill>
@@ -8569,7 +8521,7 @@
               </a:lnSpc>
             </a:pPr>
             <a:r>
-              <a:rPr lang="en-US" sz="1600" spc="133" kern="0" dirty="0">
+              <a:rPr lang="en-US" sz="1600" kern="0" spc="133" dirty="0">
                 <a:solidFill>
                   <a:srgbClr val="1E293B"/>
                 </a:solidFill>
@@ -10123,11 +10075,6 @@
               </a:rPr>
               <a:t>✓</a:t>
             </a:r>
-            <a:pPr>
-              <a:lnSpc>
-                <a:spcPct val="150000"/>
-              </a:lnSpc>
-            </a:pPr>
             <a:r>
               <a:rPr lang="en-US" sz="1870" dirty="0">
                 <a:solidFill>
@@ -10158,11 +10105,6 @@
               </a:rPr>
               <a:t>✗</a:t>
             </a:r>
-            <a:pPr>
-              <a:lnSpc>
-                <a:spcPct val="150000"/>
-              </a:lnSpc>
-            </a:pPr>
             <a:r>
               <a:rPr lang="en-US" sz="1870" dirty="0">
                 <a:solidFill>
@@ -10354,10 +10296,18 @@
   <p:clrMapOvr>
     <a:masterClrMapping/>
   </p:clrMapOvr>
-  <p:transition>
-    <p:fade/>
-    <p:spd val="med"/>
-  </p:transition>
+  <mc:AlternateContent xmlns:mc="http://schemas.openxmlformats.org/markup-compatibility/2006">
+    <mc:Choice xmlns:p159="http://schemas.microsoft.com/office/powerpoint/2015/09/main" Requires="p159">
+      <p:transition spd="slow">
+        <p159:morph option="byObject"/>
+      </p:transition>
+    </mc:Choice>
+    <mc:Fallback>
+      <p:transition spd="slow">
+        <p:fade/>
+      </p:transition>
+    </mc:Fallback>
+  </mc:AlternateContent>
 </p:sld>
 </file>
 
@@ -10366,7 +10316,7 @@
   <p:cSld name="Slide 15">
     <p:bg>
       <p:bgPr>
-        <a:gradFill rotWithShape="1" flip="none">
+        <a:gradFill flip="none" rotWithShape="1">
           <a:gsLst>
             <a:gs pos="0">
               <a:srgbClr val="F8FAFC"/>
@@ -10380,6 +10330,7 @@
           </a:gsLst>
           <a:lin ang="8100000" scaled="1"/>
         </a:gradFill>
+        <a:effectLst/>
       </p:bgPr>
     </p:bg>
     <p:spTree>
@@ -10465,7 +10416,7 @@
               </a:lnSpc>
             </a:pPr>
             <a:r>
-              <a:rPr lang="en-US" sz="8530" b="1" spc="267" kern="0" dirty="0">
+              <a:rPr lang="en-US" sz="8530" b="1" kern="0" spc="267" dirty="0">
                 <a:solidFill>
                   <a:srgbClr val="1E293B"/>
                 </a:solidFill>
@@ -10621,11 +10572,6 @@
               </a:rPr>
               <a:t>Jawwad Ahmad</a:t>
             </a:r>
-            <a:pPr algn="ctr">
-              <a:lnSpc>
-                <a:spcPct val="160000"/>
-              </a:lnSpc>
-            </a:pPr>
             <a:r>
               <a:rPr lang="en-US" sz="2130" dirty="0">
                 <a:solidFill>
@@ -10656,11 +10602,6 @@
               </a:rPr>
               <a:t>The Islamia University of Bahawalpur | Supervisor: </a:t>
             </a:r>
-            <a:pPr algn="ctr">
-              <a:lnSpc>
-                <a:spcPct val="160000"/>
-              </a:lnSpc>
-            </a:pPr>
             <a:r>
               <a:rPr lang="en-US" sz="2130" b="1" dirty="0">
                 <a:solidFill>
@@ -11329,10 +11270,18 @@
   <p:clrMapOvr>
     <a:masterClrMapping/>
   </p:clrMapOvr>
-  <p:transition>
-    <p:fade/>
-    <p:spd val="med"/>
-  </p:transition>
+  <mc:AlternateContent xmlns:mc="http://schemas.openxmlformats.org/markup-compatibility/2006">
+    <mc:Choice xmlns:p159="http://schemas.microsoft.com/office/powerpoint/2015/09/main" Requires="p159">
+      <p:transition spd="slow">
+        <p159:morph option="byObject"/>
+      </p:transition>
+    </mc:Choice>
+    <mc:Fallback>
+      <p:transition spd="slow">
+        <p:fade/>
+      </p:transition>
+    </mc:Fallback>
+  </mc:AlternateContent>
 </p:sld>
 </file>
 
@@ -11344,6 +11293,7 @@
         <a:solidFill>
           <a:srgbClr val="F8FAFC"/>
         </a:solidFill>
+        <a:effectLst/>
       </p:bgPr>
     </p:bg>
     <p:spTree>
@@ -11492,7 +11442,7 @@
               </a:lnSpc>
             </a:pPr>
             <a:r>
-              <a:rPr lang="en-US" sz="1870" spc="400" kern="0" dirty="0">
+              <a:rPr lang="en-US" sz="1870" kern="0" spc="400" dirty="0">
                 <a:solidFill>
                   <a:srgbClr val="64748B"/>
                 </a:solidFill>
@@ -12396,10 +12346,18 @@
   <p:clrMapOvr>
     <a:masterClrMapping/>
   </p:clrMapOvr>
-  <p:transition>
-    <p:fade/>
-    <p:spd val="med"/>
-  </p:transition>
+  <mc:AlternateContent xmlns:mc="http://schemas.openxmlformats.org/markup-compatibility/2006">
+    <mc:Choice xmlns:p159="http://schemas.microsoft.com/office/powerpoint/2015/09/main" Requires="p159">
+      <p:transition spd="slow">
+        <p159:morph option="byObject"/>
+      </p:transition>
+    </mc:Choice>
+    <mc:Fallback>
+      <p:transition spd="slow">
+        <p:fade/>
+      </p:transition>
+    </mc:Fallback>
+  </mc:AlternateContent>
 </p:sld>
 </file>
 
@@ -12408,7 +12366,7 @@
   <p:cSld name="Slide 3">
     <p:bg>
       <p:bgPr>
-        <a:gradFill rotWithShape="1" flip="none">
+        <a:gradFill flip="none" rotWithShape="1">
           <a:gsLst>
             <a:gs pos="0">
               <a:srgbClr val="F8FAFC"/>
@@ -12422,6 +12380,7 @@
           </a:gsLst>
           <a:lin ang="8100000" scaled="1"/>
         </a:gradFill>
+        <a:effectLst/>
       </p:bgPr>
     </p:bg>
     <p:spTree>
@@ -12698,10 +12657,18 @@
   <p:clrMapOvr>
     <a:masterClrMapping/>
   </p:clrMapOvr>
-  <p:transition>
-    <p:fade/>
-    <p:spd val="med"/>
-  </p:transition>
+  <mc:AlternateContent xmlns:mc="http://schemas.openxmlformats.org/markup-compatibility/2006">
+    <mc:Choice xmlns:p159="http://schemas.microsoft.com/office/powerpoint/2015/09/main" Requires="p159">
+      <p:transition spd="slow">
+        <p159:morph option="byObject"/>
+      </p:transition>
+    </mc:Choice>
+    <mc:Fallback>
+      <p:transition spd="slow">
+        <p:fade/>
+      </p:transition>
+    </mc:Fallback>
+  </mc:AlternateContent>
 </p:sld>
 </file>
 
@@ -12713,6 +12680,7 @@
         <a:solidFill>
           <a:srgbClr val="F8FAFC"/>
         </a:solidFill>
+        <a:effectLst/>
       </p:bgPr>
     </p:bg>
     <p:spTree>
@@ -12798,7 +12766,7 @@
               </a:lnSpc>
             </a:pPr>
             <a:r>
-              <a:rPr lang="en-US" sz="1600" spc="133" kern="0" dirty="0">
+              <a:rPr lang="en-US" sz="1600" kern="0" spc="133" dirty="0">
                 <a:solidFill>
                   <a:srgbClr val="1E293B"/>
                 </a:solidFill>
@@ -12881,7 +12849,7 @@
               </a:lnSpc>
             </a:pPr>
             <a:r>
-              <a:rPr lang="en-US" sz="1600" spc="133" kern="0" dirty="0">
+              <a:rPr lang="en-US" sz="1600" kern="0" spc="133" dirty="0">
                 <a:solidFill>
                   <a:srgbClr val="64748B"/>
                 </a:solidFill>
@@ -12944,7 +12912,7 @@
               </a:lnSpc>
             </a:pPr>
             <a:r>
-              <a:rPr lang="en-US" sz="1600" spc="133" kern="0" dirty="0">
+              <a:rPr lang="en-US" sz="1600" kern="0" spc="133" dirty="0">
                 <a:solidFill>
                   <a:srgbClr val="64748B"/>
                 </a:solidFill>
@@ -13007,7 +12975,7 @@
               </a:lnSpc>
             </a:pPr>
             <a:r>
-              <a:rPr lang="en-US" sz="1600" spc="133" kern="0" dirty="0">
+              <a:rPr lang="en-US" sz="1600" kern="0" spc="133" dirty="0">
                 <a:solidFill>
                   <a:srgbClr val="64748B"/>
                 </a:solidFill>
@@ -13271,11 +13239,6 @@
               </a:rPr>
               <a:t>■</a:t>
             </a:r>
-            <a:pPr>
-              <a:lnSpc>
-                <a:spcPct val="160000"/>
-              </a:lnSpc>
-            </a:pPr>
             <a:r>
               <a:rPr lang="en-US" sz="2400" dirty="0">
                 <a:solidFill>
@@ -13309,6 +13272,20 @@
               </a:rPr>
               <a:t>■</a:t>
             </a:r>
+            <a:r>
+              <a:rPr lang="en-US" sz="2400" dirty="0">
+                <a:solidFill>
+                  <a:srgbClr val="1E293B"/>
+                </a:solidFill>
+                <a:latin typeface="Quattrocento Sans" pitchFamily="34" charset="0"/>
+                <a:ea typeface="Quattrocento Sans" pitchFamily="34" charset="-122"/>
+                <a:cs typeface="Quattrocento Sans" pitchFamily="34" charset="-120"/>
+              </a:rPr>
+              <a:t> Serious risks in academia, journalism, medicine, and law</a:t>
+            </a:r>
+            <a:endParaRPr lang="en-US" sz="1600" dirty="0"/>
+          </a:p>
+          <a:p>
             <a:pPr>
               <a:lnSpc>
                 <a:spcPct val="160000"/>
@@ -13320,13 +13297,24 @@
             <a:r>
               <a:rPr lang="en-US" sz="2400" dirty="0">
                 <a:solidFill>
-                  <a:srgbClr val="1E293B"/>
+                  <a:srgbClr val="0891B2"/>
                 </a:solidFill>
                 <a:latin typeface="Quattrocento Sans" pitchFamily="34" charset="0"/>
                 <a:ea typeface="Quattrocento Sans" pitchFamily="34" charset="-122"/>
                 <a:cs typeface="Quattrocento Sans" pitchFamily="34" charset="-120"/>
               </a:rPr>
-              <a:t> Serious risks in academia, journalism, medicine, and law</a:t>
+              <a:t>■</a:t>
+            </a:r>
+            <a:r>
+              <a:rPr lang="en-US" sz="2400" dirty="0">
+                <a:solidFill>
+                  <a:srgbClr val="1E293B"/>
+                </a:solidFill>
+                <a:latin typeface="Quattrocento Sans" pitchFamily="34" charset="0"/>
+                <a:ea typeface="Quattrocento Sans" pitchFamily="34" charset="-122"/>
+                <a:cs typeface="Quattrocento Sans" pitchFamily="34" charset="-120"/>
+              </a:rPr>
+              <a:t> Early systems used perplexity scores &amp; stylometric indices</a:t>
             </a:r>
             <a:endParaRPr lang="en-US" sz="1600" dirty="0"/>
           </a:p>
@@ -13350,6 +13338,20 @@
               </a:rPr>
               <a:t>■</a:t>
             </a:r>
+            <a:r>
+              <a:rPr lang="en-US" sz="2400" dirty="0">
+                <a:solidFill>
+                  <a:srgbClr val="1E293B"/>
+                </a:solidFill>
+                <a:latin typeface="Quattrocento Sans" pitchFamily="34" charset="0"/>
+                <a:ea typeface="Quattrocento Sans" pitchFamily="34" charset="-122"/>
+                <a:cs typeface="Quattrocento Sans" pitchFamily="34" charset="-120"/>
+              </a:rPr>
+              <a:t> Transformers (RoBERTa, DistilBERT) achieve high accuracy but opaque decisions</a:t>
+            </a:r>
+            <a:endParaRPr lang="en-US" sz="1600" dirty="0"/>
+          </a:p>
+          <a:p>
             <a:pPr>
               <a:lnSpc>
                 <a:spcPct val="160000"/>
@@ -13361,13 +13363,24 @@
             <a:r>
               <a:rPr lang="en-US" sz="2400" dirty="0">
                 <a:solidFill>
-                  <a:srgbClr val="1E293B"/>
+                  <a:srgbClr val="0891B2"/>
                 </a:solidFill>
                 <a:latin typeface="Quattrocento Sans" pitchFamily="34" charset="0"/>
                 <a:ea typeface="Quattrocento Sans" pitchFamily="34" charset="-122"/>
                 <a:cs typeface="Quattrocento Sans" pitchFamily="34" charset="-120"/>
               </a:rPr>
-              <a:t> Early systems used perplexity scores &amp; stylometric indices</a:t>
+              <a:t>■</a:t>
+            </a:r>
+            <a:r>
+              <a:rPr lang="en-US" sz="2400" dirty="0">
+                <a:solidFill>
+                  <a:srgbClr val="1E293B"/>
+                </a:solidFill>
+                <a:latin typeface="Quattrocento Sans" pitchFamily="34" charset="0"/>
+                <a:ea typeface="Quattrocento Sans" pitchFamily="34" charset="-122"/>
+                <a:cs typeface="Quattrocento Sans" pitchFamily="34" charset="-120"/>
+              </a:rPr>
+              <a:t> Black-box decisions cannot support institutional accountability</a:t>
             </a:r>
             <a:endParaRPr lang="en-US" sz="1600" dirty="0"/>
           </a:p>
@@ -13391,14 +13404,6 @@
               </a:rPr>
               <a:t>■</a:t>
             </a:r>
-            <a:pPr>
-              <a:lnSpc>
-                <a:spcPct val="160000"/>
-              </a:lnSpc>
-              <a:spcBef>
-                <a:spcPts val="1800"/>
-              </a:spcBef>
-            </a:pPr>
             <a:r>
               <a:rPr lang="en-US" sz="2400" dirty="0">
                 <a:solidFill>
@@ -13408,98 +13413,8 @@
                 <a:ea typeface="Quattrocento Sans" pitchFamily="34" charset="-122"/>
                 <a:cs typeface="Quattrocento Sans" pitchFamily="34" charset="-120"/>
               </a:rPr>
-              <a:t> Transformers (RoBERTa, DistilBERT) achieve high accuracy but opaque decisions</a:t>
-            </a:r>
-            <a:endParaRPr lang="en-US" sz="1600" dirty="0"/>
-          </a:p>
-          <a:p>
-            <a:pPr>
-              <a:lnSpc>
-                <a:spcPct val="160000"/>
-              </a:lnSpc>
-              <a:spcBef>
-                <a:spcPts val="1800"/>
-              </a:spcBef>
-            </a:pPr>
-            <a:r>
-              <a:rPr lang="en-US" sz="2400" dirty="0">
-                <a:solidFill>
-                  <a:srgbClr val="0891B2"/>
-                </a:solidFill>
-                <a:latin typeface="Quattrocento Sans" pitchFamily="34" charset="0"/>
-                <a:ea typeface="Quattrocento Sans" pitchFamily="34" charset="-122"/>
-                <a:cs typeface="Quattrocento Sans" pitchFamily="34" charset="-120"/>
-              </a:rPr>
-              <a:t>■</a:t>
-            </a:r>
-            <a:pPr>
-              <a:lnSpc>
-                <a:spcPct val="160000"/>
-              </a:lnSpc>
-              <a:spcBef>
-                <a:spcPts val="1800"/>
-              </a:spcBef>
-            </a:pPr>
-            <a:r>
-              <a:rPr lang="en-US" sz="2400" dirty="0">
-                <a:solidFill>
-                  <a:srgbClr val="1E293B"/>
-                </a:solidFill>
-                <a:latin typeface="Quattrocento Sans" pitchFamily="34" charset="0"/>
-                <a:ea typeface="Quattrocento Sans" pitchFamily="34" charset="-122"/>
-                <a:cs typeface="Quattrocento Sans" pitchFamily="34" charset="-120"/>
-              </a:rPr>
-              <a:t> Black-box decisions cannot support institutional accountability</a:t>
-            </a:r>
-            <a:endParaRPr lang="en-US" sz="1600" dirty="0"/>
-          </a:p>
-          <a:p>
-            <a:pPr>
-              <a:lnSpc>
-                <a:spcPct val="160000"/>
-              </a:lnSpc>
-              <a:spcBef>
-                <a:spcPts val="1800"/>
-              </a:spcBef>
-            </a:pPr>
-            <a:r>
-              <a:rPr lang="en-US" sz="2400" dirty="0">
-                <a:solidFill>
-                  <a:srgbClr val="0891B2"/>
-                </a:solidFill>
-                <a:latin typeface="Quattrocento Sans" pitchFamily="34" charset="0"/>
-                <a:ea typeface="Quattrocento Sans" pitchFamily="34" charset="-122"/>
-                <a:cs typeface="Quattrocento Sans" pitchFamily="34" charset="-120"/>
-              </a:rPr>
-              <a:t>■</a:t>
-            </a:r>
-            <a:pPr>
-              <a:lnSpc>
-                <a:spcPct val="160000"/>
-              </a:lnSpc>
-              <a:spcBef>
-                <a:spcPts val="1800"/>
-              </a:spcBef>
-            </a:pPr>
-            <a:r>
-              <a:rPr lang="en-US" sz="2400" dirty="0">
-                <a:solidFill>
-                  <a:srgbClr val="1E293B"/>
-                </a:solidFill>
-                <a:latin typeface="Quattrocento Sans" pitchFamily="34" charset="0"/>
-                <a:ea typeface="Quattrocento Sans" pitchFamily="34" charset="-122"/>
-                <a:cs typeface="Quattrocento Sans" pitchFamily="34" charset="-120"/>
-              </a:rPr>
               <a:t> </a:t>
             </a:r>
-            <a:pPr>
-              <a:lnSpc>
-                <a:spcPct val="160000"/>
-              </a:lnSpc>
-              <a:spcBef>
-                <a:spcPts val="1800"/>
-              </a:spcBef>
-            </a:pPr>
             <a:r>
               <a:rPr lang="en-US" sz="2400" b="1" dirty="0">
                 <a:solidFill>
@@ -14225,10 +14140,18 @@
   <p:clrMapOvr>
     <a:masterClrMapping/>
   </p:clrMapOvr>
-  <p:transition>
-    <p:fade/>
-    <p:spd val="med"/>
-  </p:transition>
+  <mc:AlternateContent xmlns:mc="http://schemas.openxmlformats.org/markup-compatibility/2006">
+    <mc:Choice xmlns:p159="http://schemas.microsoft.com/office/powerpoint/2015/09/main" Requires="p159">
+      <p:transition spd="slow">
+        <p159:morph option="byObject"/>
+      </p:transition>
+    </mc:Choice>
+    <mc:Fallback>
+      <p:transition spd="slow">
+        <p:fade/>
+      </p:transition>
+    </mc:Fallback>
+  </mc:AlternateContent>
 </p:sld>
 </file>
 
@@ -14240,6 +14163,7 @@
         <a:solidFill>
           <a:srgbClr val="F8FAFC"/>
         </a:solidFill>
+        <a:effectLst/>
       </p:bgPr>
     </p:bg>
     <p:spTree>
@@ -14325,7 +14249,7 @@
               </a:lnSpc>
             </a:pPr>
             <a:r>
-              <a:rPr lang="en-US" sz="1600" spc="133" kern="0" dirty="0">
+              <a:rPr lang="en-US" sz="1600" kern="0" spc="133" dirty="0">
                 <a:solidFill>
                   <a:srgbClr val="1E293B"/>
                 </a:solidFill>
@@ -14408,7 +14332,7 @@
               </a:lnSpc>
             </a:pPr>
             <a:r>
-              <a:rPr lang="en-US" sz="1600" spc="133" kern="0" dirty="0">
+              <a:rPr lang="en-US" sz="1600" kern="0" spc="133" dirty="0">
                 <a:solidFill>
                   <a:srgbClr val="64748B"/>
                 </a:solidFill>
@@ -14471,7 +14395,7 @@
               </a:lnSpc>
             </a:pPr>
             <a:r>
-              <a:rPr lang="en-US" sz="1600" spc="133" kern="0" dirty="0">
+              <a:rPr lang="en-US" sz="1600" kern="0" spc="133" dirty="0">
                 <a:solidFill>
                   <a:srgbClr val="64748B"/>
                 </a:solidFill>
@@ -14534,7 +14458,7 @@
               </a:lnSpc>
             </a:pPr>
             <a:r>
-              <a:rPr lang="en-US" sz="1600" spc="133" kern="0" dirty="0">
+              <a:rPr lang="en-US" sz="1600" kern="0" spc="133" dirty="0">
                 <a:solidFill>
                   <a:srgbClr val="64748B"/>
                 </a:solidFill>
@@ -15259,11 +15183,6 @@
               </a:rPr>
               <a:t>Fast, flexible</a:t>
             </a:r>
-            <a:pPr>
-              <a:lnSpc>
-                <a:spcPct val="150000"/>
-              </a:lnSpc>
-            </a:pPr>
             <a:r>
               <a:rPr lang="en-US" sz="1870" dirty="0">
                 <a:solidFill>
@@ -15275,11 +15194,6 @@
               </a:rPr>
               <a:t> | </a:t>
             </a:r>
-            <a:pPr>
-              <a:lnSpc>
-                <a:spcPct val="150000"/>
-              </a:lnSpc>
-            </a:pPr>
             <a:r>
               <a:rPr lang="en-US" sz="1870" dirty="0">
                 <a:solidFill>
@@ -15481,11 +15395,6 @@
               </a:rPr>
               <a:t>Consistent &amp; reproducible</a:t>
             </a:r>
-            <a:pPr>
-              <a:lnSpc>
-                <a:spcPct val="150000"/>
-              </a:lnSpc>
-            </a:pPr>
             <a:r>
               <a:rPr lang="en-US" sz="1870" dirty="0">
                 <a:solidFill>
@@ -15497,11 +15406,6 @@
               </a:rPr>
               <a:t> | </a:t>
             </a:r>
-            <a:pPr>
-              <a:lnSpc>
-                <a:spcPct val="150000"/>
-              </a:lnSpc>
-            </a:pPr>
             <a:r>
               <a:rPr lang="en-US" sz="1870" dirty="0">
                 <a:solidFill>
@@ -16117,10 +16021,18 @@
   <p:clrMapOvr>
     <a:masterClrMapping/>
   </p:clrMapOvr>
-  <p:transition>
-    <p:fade/>
-    <p:spd val="med"/>
-  </p:transition>
+  <mc:AlternateContent xmlns:mc="http://schemas.openxmlformats.org/markup-compatibility/2006">
+    <mc:Choice xmlns:p159="http://schemas.microsoft.com/office/powerpoint/2015/09/main" Requires="p159">
+      <p:transition spd="slow">
+        <p159:morph option="byObject"/>
+      </p:transition>
+    </mc:Choice>
+    <mc:Fallback>
+      <p:transition spd="slow">
+        <p:fade/>
+      </p:transition>
+    </mc:Fallback>
+  </mc:AlternateContent>
 </p:sld>
 </file>
 
@@ -16129,7 +16041,7 @@
   <p:cSld name="Slide 6">
     <p:bg>
       <p:bgPr>
-        <a:gradFill rotWithShape="1" flip="none">
+        <a:gradFill flip="none" rotWithShape="1">
           <a:gsLst>
             <a:gs pos="0">
               <a:srgbClr val="F8FAFC"/>
@@ -16143,6 +16055,7 @@
           </a:gsLst>
           <a:lin ang="8100000" scaled="1"/>
         </a:gradFill>
+        <a:effectLst/>
       </p:bgPr>
     </p:bg>
     <p:spTree>
@@ -16419,10 +16332,18 @@
   <p:clrMapOvr>
     <a:masterClrMapping/>
   </p:clrMapOvr>
-  <p:transition>
-    <p:fade/>
-    <p:spd val="med"/>
-  </p:transition>
+  <mc:AlternateContent xmlns:mc="http://schemas.openxmlformats.org/markup-compatibility/2006">
+    <mc:Choice xmlns:p159="http://schemas.microsoft.com/office/powerpoint/2015/09/main" Requires="p159">
+      <p:transition spd="slow">
+        <p159:morph option="byObject"/>
+      </p:transition>
+    </mc:Choice>
+    <mc:Fallback>
+      <p:transition spd="slow">
+        <p:fade/>
+      </p:transition>
+    </mc:Fallback>
+  </mc:AlternateContent>
 </p:sld>
 </file>
 
@@ -16434,6 +16355,7 @@
         <a:solidFill>
           <a:srgbClr val="F8FAFC"/>
         </a:solidFill>
+        <a:effectLst/>
       </p:bgPr>
     </p:bg>
     <p:spTree>
@@ -16519,7 +16441,7 @@
               </a:lnSpc>
             </a:pPr>
             <a:r>
-              <a:rPr lang="en-US" sz="1600" spc="133" kern="0" dirty="0">
+              <a:rPr lang="en-US" sz="1600" kern="0" spc="133" dirty="0">
                 <a:solidFill>
                   <a:srgbClr val="64748B"/>
                 </a:solidFill>
@@ -16582,7 +16504,7 @@
               </a:lnSpc>
             </a:pPr>
             <a:r>
-              <a:rPr lang="en-US" sz="1600" spc="133" kern="0" dirty="0">
+              <a:rPr lang="en-US" sz="1600" kern="0" spc="133" dirty="0">
                 <a:solidFill>
                   <a:srgbClr val="1E293B"/>
                 </a:solidFill>
@@ -16665,7 +16587,7 @@
               </a:lnSpc>
             </a:pPr>
             <a:r>
-              <a:rPr lang="en-US" sz="1600" spc="133" kern="0" dirty="0">
+              <a:rPr lang="en-US" sz="1600" kern="0" spc="133" dirty="0">
                 <a:solidFill>
                   <a:srgbClr val="64748B"/>
                 </a:solidFill>
@@ -16728,7 +16650,7 @@
               </a:lnSpc>
             </a:pPr>
             <a:r>
-              <a:rPr lang="en-US" sz="1600" spc="133" kern="0" dirty="0">
+              <a:rPr lang="en-US" sz="1600" kern="0" spc="133" dirty="0">
                 <a:solidFill>
                   <a:srgbClr val="64748B"/>
                 </a:solidFill>
@@ -17566,11 +17488,6 @@
               </a:rPr>
               <a:t>12 studies included</a:t>
             </a:r>
-            <a:pPr>
-              <a:lnSpc>
-                <a:spcPct val="150000"/>
-              </a:lnSpc>
-            </a:pPr>
             <a:r>
               <a:rPr lang="en-US" sz="2130" dirty="0">
                 <a:solidFill>
@@ -17772,11 +17689,6 @@
               </a:rPr>
               <a:t>■</a:t>
             </a:r>
-            <a:pPr>
-              <a:lnSpc>
-                <a:spcPct val="160000"/>
-              </a:lnSpc>
-            </a:pPr>
             <a:r>
               <a:rPr lang="en-US" sz="2130" dirty="0">
                 <a:solidFill>
@@ -17807,11 +17719,6 @@
               </a:rPr>
               <a:t>■</a:t>
             </a:r>
-            <a:pPr>
-              <a:lnSpc>
-                <a:spcPct val="160000"/>
-              </a:lnSpc>
-            </a:pPr>
             <a:r>
               <a:rPr lang="en-US" sz="2130" dirty="0">
                 <a:solidFill>
@@ -17842,11 +17749,6 @@
               </a:rPr>
               <a:t>■</a:t>
             </a:r>
-            <a:pPr>
-              <a:lnSpc>
-                <a:spcPct val="160000"/>
-              </a:lnSpc>
-            </a:pPr>
             <a:r>
               <a:rPr lang="en-US" sz="2130" dirty="0">
                 <a:solidFill>
@@ -17877,11 +17779,6 @@
               </a:rPr>
               <a:t>■</a:t>
             </a:r>
-            <a:pPr>
-              <a:lnSpc>
-                <a:spcPct val="160000"/>
-              </a:lnSpc>
-            </a:pPr>
             <a:r>
               <a:rPr lang="en-US" sz="2130" dirty="0">
                 <a:solidFill>
@@ -17912,11 +17809,6 @@
               </a:rPr>
               <a:t>■</a:t>
             </a:r>
-            <a:pPr>
-              <a:lnSpc>
-                <a:spcPct val="160000"/>
-              </a:lnSpc>
-            </a:pPr>
             <a:r>
               <a:rPr lang="en-US" sz="2130" dirty="0">
                 <a:solidFill>
@@ -17947,11 +17839,6 @@
               </a:rPr>
               <a:t>■</a:t>
             </a:r>
-            <a:pPr>
-              <a:lnSpc>
-                <a:spcPct val="160000"/>
-              </a:lnSpc>
-            </a:pPr>
             <a:r>
               <a:rPr lang="en-US" sz="2130" dirty="0">
                 <a:solidFill>
@@ -18123,10 +18010,18 @@
   <p:clrMapOvr>
     <a:masterClrMapping/>
   </p:clrMapOvr>
-  <p:transition>
-    <p:fade/>
-    <p:spd val="med"/>
-  </p:transition>
+  <mc:AlternateContent xmlns:mc="http://schemas.openxmlformats.org/markup-compatibility/2006">
+    <mc:Choice xmlns:p159="http://schemas.microsoft.com/office/powerpoint/2015/09/main" Requires="p159">
+      <p:transition spd="slow">
+        <p159:morph option="byObject"/>
+      </p:transition>
+    </mc:Choice>
+    <mc:Fallback>
+      <p:transition spd="slow">
+        <p:fade/>
+      </p:transition>
+    </mc:Fallback>
+  </mc:AlternateContent>
 </p:sld>
 </file>
 
@@ -18135,7 +18030,7 @@
   <p:cSld name="Slide 8">
     <p:bg>
       <p:bgPr>
-        <a:gradFill rotWithShape="1" flip="none">
+        <a:gradFill flip="none" rotWithShape="1">
           <a:gsLst>
             <a:gs pos="0">
               <a:srgbClr val="F8FAFC"/>
@@ -18149,6 +18044,7 @@
           </a:gsLst>
           <a:lin ang="8100000" scaled="1"/>
         </a:gradFill>
+        <a:effectLst/>
       </p:bgPr>
     </p:bg>
     <p:spTree>
@@ -18425,10 +18321,18 @@
   <p:clrMapOvr>
     <a:masterClrMapping/>
   </p:clrMapOvr>
-  <p:transition>
-    <p:fade/>
-    <p:spd val="med"/>
-  </p:transition>
+  <mc:AlternateContent xmlns:mc="http://schemas.openxmlformats.org/markup-compatibility/2006">
+    <mc:Choice xmlns:p159="http://schemas.microsoft.com/office/powerpoint/2015/09/main" Requires="p159">
+      <p:transition spd="slow">
+        <p159:morph option="byObject"/>
+      </p:transition>
+    </mc:Choice>
+    <mc:Fallback>
+      <p:transition spd="slow">
+        <p:fade/>
+      </p:transition>
+    </mc:Fallback>
+  </mc:AlternateContent>
 </p:sld>
 </file>
 
@@ -18440,6 +18344,7 @@
         <a:solidFill>
           <a:srgbClr val="F8FAFC"/>
         </a:solidFill>
+        <a:effectLst/>
       </p:bgPr>
     </p:bg>
     <p:spTree>
@@ -18525,7 +18430,7 @@
               </a:lnSpc>
             </a:pPr>
             <a:r>
-              <a:rPr lang="en-US" sz="1600" spc="133" kern="0" dirty="0">
+              <a:rPr lang="en-US" sz="1600" kern="0" spc="133" dirty="0">
                 <a:solidFill>
                   <a:srgbClr val="64748B"/>
                 </a:solidFill>
@@ -18588,7 +18493,7 @@
               </a:lnSpc>
             </a:pPr>
             <a:r>
-              <a:rPr lang="en-US" sz="1600" spc="133" kern="0" dirty="0">
+              <a:rPr lang="en-US" sz="1600" kern="0" spc="133" dirty="0">
                 <a:solidFill>
                   <a:srgbClr val="64748B"/>
                 </a:solidFill>
@@ -18651,7 +18556,7 @@
               </a:lnSpc>
             </a:pPr>
             <a:r>
-              <a:rPr lang="en-US" sz="1600" spc="133" kern="0" dirty="0">
+              <a:rPr lang="en-US" sz="1600" kern="0" spc="133" dirty="0">
                 <a:solidFill>
                   <a:srgbClr val="1E293B"/>
                 </a:solidFill>
@@ -18734,7 +18639,7 @@
               </a:lnSpc>
             </a:pPr>
             <a:r>
-              <a:rPr lang="en-US" sz="1600" spc="133" kern="0" dirty="0">
+              <a:rPr lang="en-US" sz="1600" kern="0" spc="133" dirty="0">
                 <a:solidFill>
                   <a:srgbClr val="64748B"/>
                 </a:solidFill>
@@ -19874,11 +19779,6 @@
               </a:rPr>
               <a:t>■</a:t>
             </a:r>
-            <a:pPr>
-              <a:lnSpc>
-                <a:spcPct val="100000"/>
-              </a:lnSpc>
-            </a:pPr>
             <a:r>
               <a:rPr lang="en-US" sz="2000" dirty="0">
                 <a:solidFill>
@@ -19890,11 +19790,6 @@
               </a:rPr>
               <a:t> </a:t>
             </a:r>
-            <a:pPr>
-              <a:lnSpc>
-                <a:spcPct val="100000"/>
-              </a:lnSpc>
-            </a:pPr>
             <a:r>
               <a:rPr lang="en-US" sz="2000" b="1" dirty="0">
                 <a:solidFill>
@@ -19906,11 +19801,6 @@
               </a:rPr>
               <a:t>Shared finding:</a:t>
             </a:r>
-            <a:pPr>
-              <a:lnSpc>
-                <a:spcPct val="100000"/>
-              </a:lnSpc>
-            </a:pPr>
             <a:r>
               <a:rPr lang="en-US" sz="2000" dirty="0">
                 <a:solidFill>
@@ -19994,10 +19884,18 @@
   <p:clrMapOvr>
     <a:masterClrMapping/>
   </p:clrMapOvr>
-  <p:transition>
-    <p:fade/>
-    <p:spd val="med"/>
-  </p:transition>
+  <mc:AlternateContent xmlns:mc="http://schemas.openxmlformats.org/markup-compatibility/2006">
+    <mc:Choice xmlns:p159="http://schemas.microsoft.com/office/powerpoint/2015/09/main" Requires="p159">
+      <p:transition spd="slow">
+        <p159:morph option="byObject"/>
+      </p:transition>
+    </mc:Choice>
+    <mc:Fallback>
+      <p:transition spd="slow">
+        <p:fade/>
+      </p:transition>
+    </mc:Fallback>
+  </mc:AlternateContent>
 </p:sld>
 </file>
 
@@ -20009,31 +19907,31 @@
         <a:srgbClr val="000000"/>
       </a:dk1>
       <a:lt1>
-        <a:srgbClr val="ffffff"/>
+        <a:srgbClr val="FFFFFF"/>
       </a:lt1>
       <a:dk2>
         <a:srgbClr val="333333"/>
       </a:dk2>
       <a:lt2>
-        <a:srgbClr val="eeeeee"/>
+        <a:srgbClr val="EEEEEE"/>
       </a:lt2>
       <a:accent1>
-        <a:srgbClr val="8daac2"/>
+        <a:srgbClr val="8DAAC2"/>
       </a:accent1>
       <a:accent2>
-        <a:srgbClr val="ed7d31"/>
+        <a:srgbClr val="ED7D31"/>
       </a:accent2>
       <a:accent3>
-        <a:srgbClr val="a5a5a5"/>
+        <a:srgbClr val="A5A5A5"/>
       </a:accent3>
       <a:accent4>
-        <a:srgbClr val="ffc000"/>
+        <a:srgbClr val="FFC000"/>
       </a:accent4>
       <a:accent5>
-        <a:srgbClr val="4472c4"/>
+        <a:srgbClr val="4472C4"/>
       </a:accent5>
       <a:accent6>
-        <a:srgbClr val="70ad47"/>
+        <a:srgbClr val="70AD47"/>
       </a:accent6>
       <a:hlink>
         <a:srgbClr val="0563C1"/>
@@ -20294,4 +20192,299 @@
     </a:ext>
   </a:extLst>
 </a:theme>
+</file>
+
+<file path=ppt/theme/theme2.xml><?xml version="1.0" encoding="utf-8"?>
+<a:theme xmlns:a="http://schemas.openxmlformats.org/drawingml/2006/main" name="Office Theme">
+  <a:themeElements>
+    <a:clrScheme name="Office">
+      <a:dk1>
+        <a:sysClr val="windowText" lastClr="000000"/>
+      </a:dk1>
+      <a:lt1>
+        <a:sysClr val="window" lastClr="FFFFFF"/>
+      </a:lt1>
+      <a:dk2>
+        <a:srgbClr val="44546A"/>
+      </a:dk2>
+      <a:lt2>
+        <a:srgbClr val="E7E6E6"/>
+      </a:lt2>
+      <a:accent1>
+        <a:srgbClr val="4472C4"/>
+      </a:accent1>
+      <a:accent2>
+        <a:srgbClr val="ED7D31"/>
+      </a:accent2>
+      <a:accent3>
+        <a:srgbClr val="A5A5A5"/>
+      </a:accent3>
+      <a:accent4>
+        <a:srgbClr val="FFC000"/>
+      </a:accent4>
+      <a:accent5>
+        <a:srgbClr val="5B9BD5"/>
+      </a:accent5>
+      <a:accent6>
+        <a:srgbClr val="70AD47"/>
+      </a:accent6>
+      <a:hlink>
+        <a:srgbClr val="0563C1"/>
+      </a:hlink>
+      <a:folHlink>
+        <a:srgbClr val="954F72"/>
+      </a:folHlink>
+    </a:clrScheme>
+    <a:fontScheme name="Office">
+      <a:majorFont>
+        <a:latin typeface="Calibri Light" panose="020F0302020204030204"/>
+        <a:ea typeface=""/>
+        <a:cs typeface=""/>
+        <a:font script="Jpan" typeface="游ゴシック Light"/>
+        <a:font script="Hang" typeface="맑은 고딕"/>
+        <a:font script="Hans" typeface="等线 Light"/>
+        <a:font script="Hant" typeface="新細明體"/>
+        <a:font script="Arab" typeface="Times New Roman"/>
+        <a:font script="Hebr" typeface="Times New Roman"/>
+        <a:font script="Thai" typeface="Angsana New"/>
+        <a:font script="Ethi" typeface="Nyala"/>
+        <a:font script="Beng" typeface="Vrinda"/>
+        <a:font script="Gujr" typeface="Shruti"/>
+        <a:font script="Khmr" typeface="MoolBoran"/>
+        <a:font script="Knda" typeface="Tunga"/>
+        <a:font script="Guru" typeface="Raavi"/>
+        <a:font script="Cans" typeface="Euphemia"/>
+        <a:font script="Cher" typeface="Plantagenet Cherokee"/>
+        <a:font script="Yiii" typeface="Microsoft Yi Baiti"/>
+        <a:font script="Tibt" typeface="Microsoft Himalaya"/>
+        <a:font script="Thaa" typeface="MV Boli"/>
+        <a:font script="Deva" typeface="Mangal"/>
+        <a:font script="Telu" typeface="Gautami"/>
+        <a:font script="Taml" typeface="Latha"/>
+        <a:font script="Syrc" typeface="Estrangelo Edessa"/>
+        <a:font script="Orya" typeface="Kalinga"/>
+        <a:font script="Mlym" typeface="Kartika"/>
+        <a:font script="Laoo" typeface="DokChampa"/>
+        <a:font script="Sinh" typeface="Iskoola Pota"/>
+        <a:font script="Mong" typeface="Mongolian Baiti"/>
+        <a:font script="Viet" typeface="Times New Roman"/>
+        <a:font script="Uigh" typeface="Microsoft Uighur"/>
+        <a:font script="Geor" typeface="Sylfaen"/>
+        <a:font script="Armn" typeface="Arial"/>
+        <a:font script="Bugi" typeface="Leelawadee UI"/>
+        <a:font script="Bopo" typeface="Microsoft JhengHei"/>
+        <a:font script="Java" typeface="Javanese Text"/>
+        <a:font script="Lisu" typeface="Segoe UI"/>
+        <a:font script="Mymr" typeface="Myanmar Text"/>
+        <a:font script="Nkoo" typeface="Ebrima"/>
+        <a:font script="Olck" typeface="Nirmala UI"/>
+        <a:font script="Osma" typeface="Ebrima"/>
+        <a:font script="Phag" typeface="Phagspa"/>
+        <a:font script="Syrn" typeface="Estrangelo Edessa"/>
+        <a:font script="Syrj" typeface="Estrangelo Edessa"/>
+        <a:font script="Syre" typeface="Estrangelo Edessa"/>
+        <a:font script="Sora" typeface="Nirmala UI"/>
+        <a:font script="Tale" typeface="Microsoft Tai Le"/>
+        <a:font script="Talu" typeface="Microsoft New Tai Lue"/>
+        <a:font script="Tfng" typeface="Ebrima"/>
+      </a:majorFont>
+      <a:minorFont>
+        <a:latin typeface="Calibri" panose="020F0502020204030204"/>
+        <a:ea typeface=""/>
+        <a:cs typeface=""/>
+        <a:font script="Jpan" typeface="游ゴシック"/>
+        <a:font script="Hang" typeface="맑은 고딕"/>
+        <a:font script="Hans" typeface="等线"/>
+        <a:font script="Hant" typeface="新細明體"/>
+        <a:font script="Arab" typeface="Arial"/>
+        <a:font script="Hebr" typeface="Arial"/>
+        <a:font script="Thai" typeface="Cordia New"/>
+        <a:font script="Ethi" typeface="Nyala"/>
+        <a:font script="Beng" typeface="Vrinda"/>
+        <a:font script="Gujr" typeface="Shruti"/>
+        <a:font script="Khmr" typeface="DaunPenh"/>
+        <a:font script="Knda" typeface="Tunga"/>
+        <a:font script="Guru" typeface="Raavi"/>
+        <a:font script="Cans" typeface="Euphemia"/>
+        <a:font script="Cher" typeface="Plantagenet Cherokee"/>
+        <a:font script="Yiii" typeface="Microsoft Yi Baiti"/>
+        <a:font script="Tibt" typeface="Microsoft Himalaya"/>
+        <a:font script="Thaa" typeface="MV Boli"/>
+        <a:font script="Deva" typeface="Mangal"/>
+        <a:font script="Telu" typeface="Gautami"/>
+        <a:font script="Taml" typeface="Latha"/>
+        <a:font script="Syrc" typeface="Estrangelo Edessa"/>
+        <a:font script="Orya" typeface="Kalinga"/>
+        <a:font script="Mlym" typeface="Kartika"/>
+        <a:font script="Laoo" typeface="DokChampa"/>
+        <a:font script="Sinh" typeface="Iskoola Pota"/>
+        <a:font script="Mong" typeface="Mongolian Baiti"/>
+        <a:font script="Viet" typeface="Arial"/>
+        <a:font script="Uigh" typeface="Microsoft Uighur"/>
+        <a:font script="Geor" typeface="Sylfaen"/>
+        <a:font script="Armn" typeface="Arial"/>
+        <a:font script="Bugi" typeface="Leelawadee UI"/>
+        <a:font script="Bopo" typeface="Microsoft JhengHei"/>
+        <a:font script="Java" typeface="Javanese Text"/>
+        <a:font script="Lisu" typeface="Segoe UI"/>
+        <a:font script="Mymr" typeface="Myanmar Text"/>
+        <a:font script="Nkoo" typeface="Ebrima"/>
+        <a:font script="Olck" typeface="Nirmala UI"/>
+        <a:font script="Osma" typeface="Ebrima"/>
+        <a:font script="Phag" typeface="Phagspa"/>
+        <a:font script="Syrn" typeface="Estrangelo Edessa"/>
+        <a:font script="Syrj" typeface="Estrangelo Edessa"/>
+        <a:font script="Syre" typeface="Estrangelo Edessa"/>
+        <a:font script="Sora" typeface="Nirmala UI"/>
+        <a:font script="Tale" typeface="Microsoft Tai Le"/>
+        <a:font script="Talu" typeface="Microsoft New Tai Lue"/>
+        <a:font script="Tfng" typeface="Ebrima"/>
+      </a:minorFont>
+    </a:fontScheme>
+    <a:fmtScheme name="Office">
+      <a:fillStyleLst>
+        <a:solidFill>
+          <a:schemeClr val="phClr"/>
+        </a:solidFill>
+        <a:gradFill rotWithShape="1">
+          <a:gsLst>
+            <a:gs pos="0">
+              <a:schemeClr val="phClr">
+                <a:lumMod val="110000"/>
+                <a:satMod val="105000"/>
+                <a:tint val="67000"/>
+              </a:schemeClr>
+            </a:gs>
+            <a:gs pos="50000">
+              <a:schemeClr val="phClr">
+                <a:lumMod val="105000"/>
+                <a:satMod val="103000"/>
+                <a:tint val="73000"/>
+              </a:schemeClr>
+            </a:gs>
+            <a:gs pos="100000">
+              <a:schemeClr val="phClr">
+                <a:lumMod val="105000"/>
+                <a:satMod val="109000"/>
+                <a:tint val="81000"/>
+              </a:schemeClr>
+            </a:gs>
+          </a:gsLst>
+          <a:lin ang="5400000" scaled="0"/>
+        </a:gradFill>
+        <a:gradFill rotWithShape="1">
+          <a:gsLst>
+            <a:gs pos="0">
+              <a:schemeClr val="phClr">
+                <a:satMod val="103000"/>
+                <a:lumMod val="102000"/>
+                <a:tint val="94000"/>
+              </a:schemeClr>
+            </a:gs>
+            <a:gs pos="50000">
+              <a:schemeClr val="phClr">
+                <a:satMod val="110000"/>
+                <a:lumMod val="100000"/>
+                <a:shade val="100000"/>
+              </a:schemeClr>
+            </a:gs>
+            <a:gs pos="100000">
+              <a:schemeClr val="phClr">
+                <a:lumMod val="99000"/>
+                <a:satMod val="120000"/>
+                <a:shade val="78000"/>
+              </a:schemeClr>
+            </a:gs>
+          </a:gsLst>
+          <a:lin ang="5400000" scaled="0"/>
+        </a:gradFill>
+      </a:fillStyleLst>
+      <a:lnStyleLst>
+        <a:ln w="6350" cap="flat" cmpd="sng" algn="ctr">
+          <a:solidFill>
+            <a:schemeClr val="phClr"/>
+          </a:solidFill>
+          <a:prstDash val="solid"/>
+          <a:miter lim="800000"/>
+        </a:ln>
+        <a:ln w="12700" cap="flat" cmpd="sng" algn="ctr">
+          <a:solidFill>
+            <a:schemeClr val="phClr"/>
+          </a:solidFill>
+          <a:prstDash val="solid"/>
+          <a:miter lim="800000"/>
+        </a:ln>
+        <a:ln w="19050" cap="flat" cmpd="sng" algn="ctr">
+          <a:solidFill>
+            <a:schemeClr val="phClr"/>
+          </a:solidFill>
+          <a:prstDash val="solid"/>
+          <a:miter lim="800000"/>
+        </a:ln>
+      </a:lnStyleLst>
+      <a:effectStyleLst>
+        <a:effectStyle>
+          <a:effectLst/>
+        </a:effectStyle>
+        <a:effectStyle>
+          <a:effectLst/>
+        </a:effectStyle>
+        <a:effectStyle>
+          <a:effectLst>
+            <a:outerShdw blurRad="57150" dist="19050" dir="5400000" algn="ctr" rotWithShape="0">
+              <a:srgbClr val="000000">
+                <a:alpha val="63000"/>
+              </a:srgbClr>
+            </a:outerShdw>
+          </a:effectLst>
+        </a:effectStyle>
+      </a:effectStyleLst>
+      <a:bgFillStyleLst>
+        <a:solidFill>
+          <a:schemeClr val="phClr"/>
+        </a:solidFill>
+        <a:solidFill>
+          <a:schemeClr val="phClr">
+            <a:tint val="95000"/>
+            <a:satMod val="170000"/>
+          </a:schemeClr>
+        </a:solidFill>
+        <a:gradFill rotWithShape="1">
+          <a:gsLst>
+            <a:gs pos="0">
+              <a:schemeClr val="phClr">
+                <a:tint val="93000"/>
+                <a:satMod val="150000"/>
+                <a:shade val="98000"/>
+                <a:lumMod val="102000"/>
+              </a:schemeClr>
+            </a:gs>
+            <a:gs pos="50000">
+              <a:schemeClr val="phClr">
+                <a:tint val="98000"/>
+                <a:satMod val="130000"/>
+                <a:shade val="90000"/>
+                <a:lumMod val="103000"/>
+              </a:schemeClr>
+            </a:gs>
+            <a:gs pos="100000">
+              <a:schemeClr val="phClr">
+                <a:shade val="63000"/>
+                <a:satMod val="120000"/>
+              </a:schemeClr>
+            </a:gs>
+          </a:gsLst>
+          <a:lin ang="5400000" scaled="0"/>
+        </a:gradFill>
+      </a:bgFillStyleLst>
+    </a:fmtScheme>
+  </a:themeElements>
+  <a:objectDefaults/>
+  <a:extraClrSchemeLst/>
+  <a:extLst>
+    <a:ext uri="{05A4C25C-085E-4340-85A3-A5531E510DB2}">
+      <thm15:themeFamily xmlns:thm15="http://schemas.microsoft.com/office/thememl/2012/main" name="Office Theme" id="{62F939B6-93AF-4DB8-9C6B-D6C7DFDC589F}" vid="{4A3C46E8-61CC-4603-A589-7422A47A8E4A}"/>
+    </a:ext>
+  </a:extLst>
+</a:theme>
 </file>